--- a/output_visuals/powerpoint/03_canopy_by_year.pptx
+++ b/output_visuals/powerpoint/03_canopy_by_year.pptx
@@ -2298,20 +2298,20 @@
           <p:spPr>
             <a:xfrm>
               <a:off x="1329762" y="5423503"/>
-              <a:ext cx="5242184" cy="0"/>
+              <a:ext cx="4262039" cy="0"/>
             </a:xfrm>
             <a:custGeom>
               <a:avLst/>
               <a:pathLst>
-                <a:path w="5242184" h="0">
+                <a:path w="4262039" h="0">
                   <a:moveTo>
                     <a:pt x="0" y="0"/>
                   </a:moveTo>
                   <a:lnTo>
-                    <a:pt x="5242184" y="0"/>
-                  </a:lnTo>
-                  <a:lnTo>
-                    <a:pt x="5242184" y="0"/>
+                    <a:pt x="4262039" y="0"/>
+                  </a:lnTo>
+                  <a:lnTo>
+                    <a:pt x="4262039" y="0"/>
                   </a:lnTo>
                 </a:path>
               </a:pathLst>
@@ -2340,21 +2340,21 @@
           </p:nvSpPr>
           <p:spPr>
             <a:xfrm>
-              <a:off x="1329762" y="4710738"/>
-              <a:ext cx="5242184" cy="0"/>
+              <a:off x="1329762" y="4787106"/>
+              <a:ext cx="4262039" cy="0"/>
             </a:xfrm>
             <a:custGeom>
               <a:avLst/>
               <a:pathLst>
-                <a:path w="5242184" h="0">
+                <a:path w="4262039" h="0">
                   <a:moveTo>
                     <a:pt x="0" y="0"/>
                   </a:moveTo>
                   <a:lnTo>
-                    <a:pt x="5242184" y="0"/>
-                  </a:lnTo>
-                  <a:lnTo>
-                    <a:pt x="5242184" y="0"/>
+                    <a:pt x="4262039" y="0"/>
+                  </a:lnTo>
+                  <a:lnTo>
+                    <a:pt x="4262039" y="0"/>
                   </a:lnTo>
                 </a:path>
               </a:pathLst>
@@ -2383,21 +2383,21 @@
           </p:nvSpPr>
           <p:spPr>
             <a:xfrm>
-              <a:off x="1329762" y="3997974"/>
-              <a:ext cx="5242184" cy="0"/>
+              <a:off x="1329762" y="4150709"/>
+              <a:ext cx="4262039" cy="0"/>
             </a:xfrm>
             <a:custGeom>
               <a:avLst/>
               <a:pathLst>
-                <a:path w="5242184" h="0">
+                <a:path w="4262039" h="0">
                   <a:moveTo>
                     <a:pt x="0" y="0"/>
                   </a:moveTo>
                   <a:lnTo>
-                    <a:pt x="5242184" y="0"/>
-                  </a:lnTo>
-                  <a:lnTo>
-                    <a:pt x="5242184" y="0"/>
+                    <a:pt x="4262039" y="0"/>
+                  </a:lnTo>
+                  <a:lnTo>
+                    <a:pt x="4262039" y="0"/>
                   </a:lnTo>
                 </a:path>
               </a:pathLst>
@@ -2426,21 +2426,21 @@
           </p:nvSpPr>
           <p:spPr>
             <a:xfrm>
-              <a:off x="1329762" y="3285209"/>
-              <a:ext cx="5242184" cy="0"/>
+              <a:off x="1329762" y="3514312"/>
+              <a:ext cx="4262039" cy="0"/>
             </a:xfrm>
             <a:custGeom>
               <a:avLst/>
               <a:pathLst>
-                <a:path w="5242184" h="0">
+                <a:path w="4262039" h="0">
                   <a:moveTo>
                     <a:pt x="0" y="0"/>
                   </a:moveTo>
                   <a:lnTo>
-                    <a:pt x="5242184" y="0"/>
-                  </a:lnTo>
-                  <a:lnTo>
-                    <a:pt x="5242184" y="0"/>
+                    <a:pt x="4262039" y="0"/>
+                  </a:lnTo>
+                  <a:lnTo>
+                    <a:pt x="4262039" y="0"/>
                   </a:lnTo>
                 </a:path>
               </a:pathLst>
@@ -2469,21 +2469,21 @@
           </p:nvSpPr>
           <p:spPr>
             <a:xfrm>
-              <a:off x="1329762" y="2572444"/>
-              <a:ext cx="5242184" cy="0"/>
+              <a:off x="1329762" y="2877915"/>
+              <a:ext cx="4262039" cy="0"/>
             </a:xfrm>
             <a:custGeom>
               <a:avLst/>
               <a:pathLst>
-                <a:path w="5242184" h="0">
+                <a:path w="4262039" h="0">
                   <a:moveTo>
                     <a:pt x="0" y="0"/>
                   </a:moveTo>
                   <a:lnTo>
-                    <a:pt x="5242184" y="0"/>
-                  </a:lnTo>
-                  <a:lnTo>
-                    <a:pt x="5242184" y="0"/>
+                    <a:pt x="4262039" y="0"/>
+                  </a:lnTo>
+                  <a:lnTo>
+                    <a:pt x="4262039" y="0"/>
                   </a:lnTo>
                 </a:path>
               </a:pathLst>
@@ -2512,21 +2512,21 @@
           </p:nvSpPr>
           <p:spPr>
             <a:xfrm>
-              <a:off x="1329762" y="1859680"/>
-              <a:ext cx="5242184" cy="0"/>
+              <a:off x="1329762" y="2241518"/>
+              <a:ext cx="4262039" cy="0"/>
             </a:xfrm>
             <a:custGeom>
               <a:avLst/>
               <a:pathLst>
-                <a:path w="5242184" h="0">
+                <a:path w="4262039" h="0">
                   <a:moveTo>
                     <a:pt x="0" y="0"/>
                   </a:moveTo>
                   <a:lnTo>
-                    <a:pt x="5242184" y="0"/>
-                  </a:lnTo>
-                  <a:lnTo>
-                    <a:pt x="5242184" y="0"/>
+                    <a:pt x="4262039" y="0"/>
+                  </a:lnTo>
+                  <a:lnTo>
+                    <a:pt x="4262039" y="0"/>
                   </a:lnTo>
                 </a:path>
               </a:pathLst>
@@ -2555,7 +2555,7 @@
           </p:nvSpPr>
           <p:spPr>
             <a:xfrm>
-              <a:off x="1568043" y="1681489"/>
+              <a:off x="1523491" y="1681489"/>
               <a:ext cx="0" cy="3920204"/>
             </a:xfrm>
             <a:custGeom>
@@ -2598,7 +2598,7 @@
           </p:nvSpPr>
           <p:spPr>
             <a:xfrm>
-              <a:off x="2203459" y="1681489"/>
+              <a:off x="2040102" y="1681489"/>
               <a:ext cx="0" cy="3920204"/>
             </a:xfrm>
             <a:custGeom>
@@ -2641,7 +2641,7 @@
           </p:nvSpPr>
           <p:spPr>
             <a:xfrm>
-              <a:off x="2838876" y="1681489"/>
+              <a:off x="2556713" y="1681489"/>
               <a:ext cx="0" cy="3920204"/>
             </a:xfrm>
             <a:custGeom>
@@ -2684,7 +2684,7 @@
           </p:nvSpPr>
           <p:spPr>
             <a:xfrm>
-              <a:off x="3474292" y="1681489"/>
+              <a:off x="3073323" y="1681489"/>
               <a:ext cx="0" cy="3920204"/>
             </a:xfrm>
             <a:custGeom>
@@ -2727,7 +2727,7 @@
           </p:nvSpPr>
           <p:spPr>
             <a:xfrm>
-              <a:off x="4109708" y="1681489"/>
+              <a:off x="3589934" y="1681489"/>
               <a:ext cx="0" cy="3920204"/>
             </a:xfrm>
             <a:custGeom>
@@ -2770,7 +2770,7 @@
           </p:nvSpPr>
           <p:spPr>
             <a:xfrm>
-              <a:off x="4745125" y="1681489"/>
+              <a:off x="4106545" y="1681489"/>
               <a:ext cx="0" cy="3920204"/>
             </a:xfrm>
             <a:custGeom>
@@ -2813,7 +2813,7 @@
           </p:nvSpPr>
           <p:spPr>
             <a:xfrm>
-              <a:off x="5380541" y="1681489"/>
+              <a:off x="4623156" y="1681489"/>
               <a:ext cx="0" cy="3920204"/>
             </a:xfrm>
             <a:custGeom>
@@ -2856,7 +2856,7 @@
           </p:nvSpPr>
           <p:spPr>
             <a:xfrm>
-              <a:off x="6015957" y="1681489"/>
+              <a:off x="5139767" y="1681489"/>
               <a:ext cx="0" cy="3920204"/>
             </a:xfrm>
             <a:custGeom>
@@ -2899,60 +2899,60 @@
           </p:nvSpPr>
           <p:spPr>
             <a:xfrm>
-              <a:off x="1568043" y="3045736"/>
-              <a:ext cx="4765622" cy="467152"/>
+              <a:off x="1523491" y="3300496"/>
+              <a:ext cx="3874581" cy="417100"/>
             </a:xfrm>
             <a:custGeom>
               <a:avLst/>
               <a:pathLst>
-                <a:path w="4765622" h="467152">
+                <a:path w="3874581" h="417100">
                   <a:moveTo>
-                    <a:pt x="0" y="280359"/>
+                    <a:pt x="0" y="250321"/>
                   </a:moveTo>
                   <a:lnTo>
-                    <a:pt x="317708" y="251633"/>
-                  </a:lnTo>
-                  <a:lnTo>
-                    <a:pt x="635416" y="185971"/>
-                  </a:lnTo>
-                  <a:lnTo>
-                    <a:pt x="953124" y="118691"/>
-                  </a:lnTo>
-                  <a:lnTo>
-                    <a:pt x="1270832" y="125834"/>
-                  </a:lnTo>
-                  <a:lnTo>
-                    <a:pt x="1588540" y="123043"/>
-                  </a:lnTo>
-                  <a:lnTo>
-                    <a:pt x="1906248" y="0"/>
-                  </a:lnTo>
-                  <a:lnTo>
-                    <a:pt x="2223957" y="18903"/>
-                  </a:lnTo>
-                  <a:lnTo>
-                    <a:pt x="2541665" y="48278"/>
-                  </a:lnTo>
-                  <a:lnTo>
-                    <a:pt x="2859373" y="176135"/>
-                  </a:lnTo>
-                  <a:lnTo>
-                    <a:pt x="3177081" y="234775"/>
-                  </a:lnTo>
-                  <a:lnTo>
-                    <a:pt x="3494789" y="208723"/>
-                  </a:lnTo>
-                  <a:lnTo>
-                    <a:pt x="3812497" y="158804"/>
-                  </a:lnTo>
-                  <a:lnTo>
-                    <a:pt x="4130206" y="326233"/>
-                  </a:lnTo>
-                  <a:lnTo>
-                    <a:pt x="4447914" y="261971"/>
-                  </a:lnTo>
-                  <a:lnTo>
-                    <a:pt x="4765622" y="467152"/>
+                    <a:pt x="258305" y="224673"/>
+                  </a:lnTo>
+                  <a:lnTo>
+                    <a:pt x="516610" y="166046"/>
+                  </a:lnTo>
+                  <a:lnTo>
+                    <a:pt x="774916" y="105974"/>
+                  </a:lnTo>
+                  <a:lnTo>
+                    <a:pt x="1033221" y="112352"/>
+                  </a:lnTo>
+                  <a:lnTo>
+                    <a:pt x="1291527" y="109860"/>
+                  </a:lnTo>
+                  <a:lnTo>
+                    <a:pt x="1549832" y="0"/>
+                  </a:lnTo>
+                  <a:lnTo>
+                    <a:pt x="1808137" y="16877"/>
+                  </a:lnTo>
+                  <a:lnTo>
+                    <a:pt x="2066443" y="43106"/>
+                  </a:lnTo>
+                  <a:lnTo>
+                    <a:pt x="2324748" y="157263"/>
+                  </a:lnTo>
+                  <a:lnTo>
+                    <a:pt x="2583054" y="209620"/>
+                  </a:lnTo>
+                  <a:lnTo>
+                    <a:pt x="2841359" y="186360"/>
+                  </a:lnTo>
+                  <a:lnTo>
+                    <a:pt x="3099664" y="141790"/>
+                  </a:lnTo>
+                  <a:lnTo>
+                    <a:pt x="3357970" y="291279"/>
+                  </a:lnTo>
+                  <a:lnTo>
+                    <a:pt x="3616275" y="233903"/>
+                  </a:lnTo>
+                  <a:lnTo>
+                    <a:pt x="3874581" y="417100"/>
                   </a:lnTo>
                 </a:path>
               </a:pathLst>
@@ -2981,60 +2981,60 @@
           </p:nvSpPr>
           <p:spPr>
             <a:xfrm>
-              <a:off x="1568043" y="3238123"/>
-              <a:ext cx="4765622" cy="714743"/>
+              <a:off x="1523491" y="3472270"/>
+              <a:ext cx="3874581" cy="638163"/>
             </a:xfrm>
             <a:custGeom>
               <a:avLst/>
               <a:pathLst>
-                <a:path w="4765622" h="714743">
+                <a:path w="3874581" h="638163">
                   <a:moveTo>
-                    <a:pt x="0" y="523039"/>
+                    <a:pt x="0" y="466999"/>
                   </a:moveTo>
                   <a:lnTo>
-                    <a:pt x="317708" y="551727"/>
-                  </a:lnTo>
-                  <a:lnTo>
-                    <a:pt x="635416" y="569112"/>
-                  </a:lnTo>
-                  <a:lnTo>
-                    <a:pt x="953124" y="560503"/>
-                  </a:lnTo>
-                  <a:lnTo>
-                    <a:pt x="1270832" y="714743"/>
-                  </a:lnTo>
-                  <a:lnTo>
-                    <a:pt x="1588540" y="701461"/>
-                  </a:lnTo>
-                  <a:lnTo>
-                    <a:pt x="1906248" y="263043"/>
-                  </a:lnTo>
-                  <a:lnTo>
-                    <a:pt x="2223957" y="270039"/>
-                  </a:lnTo>
-                  <a:lnTo>
-                    <a:pt x="2541665" y="382501"/>
-                  </a:lnTo>
-                  <a:lnTo>
-                    <a:pt x="2859373" y="481317"/>
-                  </a:lnTo>
-                  <a:lnTo>
-                    <a:pt x="3177081" y="689831"/>
-                  </a:lnTo>
-                  <a:lnTo>
-                    <a:pt x="3494789" y="713801"/>
-                  </a:lnTo>
-                  <a:lnTo>
-                    <a:pt x="3812497" y="536624"/>
-                  </a:lnTo>
-                  <a:lnTo>
-                    <a:pt x="4130206" y="304544"/>
-                  </a:lnTo>
-                  <a:lnTo>
-                    <a:pt x="4447914" y="58443"/>
-                  </a:lnTo>
-                  <a:lnTo>
-                    <a:pt x="4765622" y="0"/>
+                    <a:pt x="258305" y="492613"/>
+                  </a:lnTo>
+                  <a:lnTo>
+                    <a:pt x="516610" y="508136"/>
+                  </a:lnTo>
+                  <a:lnTo>
+                    <a:pt x="774916" y="500449"/>
+                  </a:lnTo>
+                  <a:lnTo>
+                    <a:pt x="1033221" y="638163"/>
+                  </a:lnTo>
+                  <a:lnTo>
+                    <a:pt x="1291527" y="626305"/>
+                  </a:lnTo>
+                  <a:lnTo>
+                    <a:pt x="1549832" y="234860"/>
+                  </a:lnTo>
+                  <a:lnTo>
+                    <a:pt x="1808137" y="241106"/>
+                  </a:lnTo>
+                  <a:lnTo>
+                    <a:pt x="2066443" y="341519"/>
+                  </a:lnTo>
+                  <a:lnTo>
+                    <a:pt x="2324748" y="429747"/>
+                  </a:lnTo>
+                  <a:lnTo>
+                    <a:pt x="2583054" y="615920"/>
+                  </a:lnTo>
+                  <a:lnTo>
+                    <a:pt x="2841359" y="637322"/>
+                  </a:lnTo>
+                  <a:lnTo>
+                    <a:pt x="3099664" y="479129"/>
+                  </a:lnTo>
+                  <a:lnTo>
+                    <a:pt x="3357970" y="271915"/>
+                  </a:lnTo>
+                  <a:lnTo>
+                    <a:pt x="3616275" y="52181"/>
+                  </a:lnTo>
+                  <a:lnTo>
+                    <a:pt x="3874581" y="0"/>
                   </a:lnTo>
                 </a:path>
               </a:pathLst>
@@ -3063,60 +3063,60 @@
           </p:nvSpPr>
           <p:spPr>
             <a:xfrm>
-              <a:off x="1568043" y="3279658"/>
-              <a:ext cx="4765622" cy="1318724"/>
+              <a:off x="1523491" y="3509356"/>
+              <a:ext cx="3874581" cy="1177432"/>
             </a:xfrm>
             <a:custGeom>
               <a:avLst/>
               <a:pathLst>
-                <a:path w="4765622" h="1318724">
+                <a:path w="3874581" h="1177432">
                   <a:moveTo>
-                    <a:pt x="0" y="936533"/>
+                    <a:pt x="0" y="836190"/>
                   </a:moveTo>
                   <a:lnTo>
-                    <a:pt x="317708" y="891891"/>
-                  </a:lnTo>
-                  <a:lnTo>
-                    <a:pt x="635416" y="811433"/>
-                  </a:lnTo>
-                  <a:lnTo>
-                    <a:pt x="953124" y="714671"/>
-                  </a:lnTo>
-                  <a:lnTo>
-                    <a:pt x="1270832" y="834787"/>
-                  </a:lnTo>
-                  <a:lnTo>
-                    <a:pt x="1588540" y="823010"/>
-                  </a:lnTo>
-                  <a:lnTo>
-                    <a:pt x="1906248" y="440355"/>
-                  </a:lnTo>
-                  <a:lnTo>
-                    <a:pt x="2223957" y="417202"/>
-                  </a:lnTo>
-                  <a:lnTo>
-                    <a:pt x="2541665" y="539026"/>
-                  </a:lnTo>
-                  <a:lnTo>
-                    <a:pt x="2859373" y="491123"/>
-                  </a:lnTo>
-                  <a:lnTo>
-                    <a:pt x="3177081" y="337538"/>
-                  </a:lnTo>
-                  <a:lnTo>
-                    <a:pt x="3494789" y="179668"/>
-                  </a:lnTo>
-                  <a:lnTo>
-                    <a:pt x="3812497" y="41889"/>
-                  </a:lnTo>
-                  <a:lnTo>
-                    <a:pt x="4130206" y="0"/>
-                  </a:lnTo>
-                  <a:lnTo>
-                    <a:pt x="4447914" y="269282"/>
-                  </a:lnTo>
-                  <a:lnTo>
-                    <a:pt x="4765622" y="1318724"/>
+                    <a:pt x="258305" y="796332"/>
+                  </a:lnTo>
+                  <a:lnTo>
+                    <a:pt x="516610" y="724494"/>
+                  </a:lnTo>
+                  <a:lnTo>
+                    <a:pt x="774916" y="638099"/>
+                  </a:lnTo>
+                  <a:lnTo>
+                    <a:pt x="1033221" y="745345"/>
+                  </a:lnTo>
+                  <a:lnTo>
+                    <a:pt x="1291527" y="734830"/>
+                  </a:lnTo>
+                  <a:lnTo>
+                    <a:pt x="1549832" y="393174"/>
+                  </a:lnTo>
+                  <a:lnTo>
+                    <a:pt x="1808137" y="372502"/>
+                  </a:lnTo>
+                  <a:lnTo>
+                    <a:pt x="2066443" y="481273"/>
+                  </a:lnTo>
+                  <a:lnTo>
+                    <a:pt x="2324748" y="438503"/>
+                  </a:lnTo>
+                  <a:lnTo>
+                    <a:pt x="2583054" y="301373"/>
+                  </a:lnTo>
+                  <a:lnTo>
+                    <a:pt x="2841359" y="160417"/>
+                  </a:lnTo>
+                  <a:lnTo>
+                    <a:pt x="3099664" y="37401"/>
+                  </a:lnTo>
+                  <a:lnTo>
+                    <a:pt x="3357970" y="0"/>
+                  </a:lnTo>
+                  <a:lnTo>
+                    <a:pt x="3616275" y="240430"/>
+                  </a:lnTo>
+                  <a:lnTo>
+                    <a:pt x="3874581" y="1177432"/>
                   </a:lnTo>
                 </a:path>
               </a:pathLst>
@@ -3145,66 +3145,230 @@
           </p:nvSpPr>
           <p:spPr>
             <a:xfrm>
-              <a:off x="1568043" y="2633214"/>
-              <a:ext cx="4765622" cy="332416"/>
+              <a:off x="1523491" y="2818365"/>
+              <a:ext cx="3874581" cy="1661975"/>
             </a:xfrm>
             <a:custGeom>
               <a:avLst/>
               <a:pathLst>
-                <a:path w="4765622" h="332416">
+                <a:path w="3874581" h="1661975">
                   <a:moveTo>
-                    <a:pt x="0" y="332416"/>
+                    <a:pt x="0" y="360517"/>
                   </a:moveTo>
                   <a:lnTo>
-                    <a:pt x="317708" y="309242"/>
-                  </a:lnTo>
-                  <a:lnTo>
-                    <a:pt x="635416" y="265053"/>
-                  </a:lnTo>
-                  <a:lnTo>
-                    <a:pt x="953124" y="229119"/>
-                  </a:lnTo>
-                  <a:lnTo>
-                    <a:pt x="1270832" y="221831"/>
-                  </a:lnTo>
-                  <a:lnTo>
-                    <a:pt x="1588540" y="206029"/>
-                  </a:lnTo>
-                  <a:lnTo>
-                    <a:pt x="1906248" y="80495"/>
-                  </a:lnTo>
-                  <a:lnTo>
-                    <a:pt x="2223957" y="92441"/>
-                  </a:lnTo>
-                  <a:lnTo>
-                    <a:pt x="2541665" y="147481"/>
-                  </a:lnTo>
-                  <a:lnTo>
-                    <a:pt x="2859373" y="179754"/>
-                  </a:lnTo>
-                  <a:lnTo>
-                    <a:pt x="3177081" y="196505"/>
-                  </a:lnTo>
-                  <a:lnTo>
-                    <a:pt x="3494789" y="174827"/>
-                  </a:lnTo>
-                  <a:lnTo>
-                    <a:pt x="3812497" y="115518"/>
-                  </a:lnTo>
-                  <a:lnTo>
-                    <a:pt x="4130206" y="98289"/>
-                  </a:lnTo>
-                  <a:lnTo>
-                    <a:pt x="4447914" y="0"/>
-                  </a:lnTo>
-                  <a:lnTo>
-                    <a:pt x="4765622" y="84900"/>
+                    <a:pt x="258305" y="345276"/>
+                  </a:lnTo>
+                  <a:lnTo>
+                    <a:pt x="516610" y="299839"/>
+                  </a:lnTo>
+                  <a:lnTo>
+                    <a:pt x="774916" y="253706"/>
+                  </a:lnTo>
+                  <a:lnTo>
+                    <a:pt x="1033221" y="289834"/>
+                  </a:lnTo>
+                  <a:lnTo>
+                    <a:pt x="1291527" y="242495"/>
+                  </a:lnTo>
+                  <a:lnTo>
+                    <a:pt x="1549832" y="70087"/>
+                  </a:lnTo>
+                  <a:lnTo>
+                    <a:pt x="1808137" y="32349"/>
+                  </a:lnTo>
+                  <a:lnTo>
+                    <a:pt x="2066443" y="0"/>
+                  </a:lnTo>
+                  <a:lnTo>
+                    <a:pt x="2324748" y="658"/>
+                  </a:lnTo>
+                  <a:lnTo>
+                    <a:pt x="2583054" y="20342"/>
+                  </a:lnTo>
+                  <a:lnTo>
+                    <a:pt x="2841359" y="117154"/>
+                  </a:lnTo>
+                  <a:lnTo>
+                    <a:pt x="3099664" y="217191"/>
+                  </a:lnTo>
+                  <a:lnTo>
+                    <a:pt x="3357970" y="614052"/>
+                  </a:lnTo>
+                  <a:lnTo>
+                    <a:pt x="3616275" y="724913"/>
+                  </a:lnTo>
+                  <a:lnTo>
+                    <a:pt x="3874581" y="1661975"/>
                   </a:lnTo>
                 </a:path>
               </a:pathLst>
             </a:custGeom>
             <a:ln w="35231" cap="flat">
               <a:solidFill>
+                <a:srgbClr val="E7298A">
+                  <a:alpha val="100000"/>
+                </a:srgbClr>
+              </a:solidFill>
+              <a:prstDash val="solid"/>
+              <a:round/>
+            </a:ln>
+          </p:spPr>
+          <p:txBody>
+            <a:bodyPr/>
+            <a:lstStyle/>
+            <a:p/>
+          </p:txBody>
+        </p:sp>
+        <p:sp>
+          <p:nvSpPr>
+            <p:cNvPr id="23" name="pl23"/>
+            <p:cNvSpPr/>
+            <p:nvPr/>
+          </p:nvSpPr>
+          <p:spPr>
+            <a:xfrm>
+              <a:off x="1523491" y="2560543"/>
+              <a:ext cx="3874581" cy="211420"/>
+            </a:xfrm>
+            <a:custGeom>
+              <a:avLst/>
+              <a:pathLst>
+                <a:path w="3874581" h="211420">
+                  <a:moveTo>
+                    <a:pt x="0" y="211420"/>
+                  </a:moveTo>
+                  <a:lnTo>
+                    <a:pt x="258305" y="172303"/>
+                  </a:lnTo>
+                  <a:lnTo>
+                    <a:pt x="516610" y="135506"/>
+                  </a:lnTo>
+                  <a:lnTo>
+                    <a:pt x="774916" y="102998"/>
+                  </a:lnTo>
+                  <a:lnTo>
+                    <a:pt x="1033221" y="90015"/>
+                  </a:lnTo>
+                  <a:lnTo>
+                    <a:pt x="1291527" y="78650"/>
+                  </a:lnTo>
+                  <a:lnTo>
+                    <a:pt x="1549832" y="7709"/>
+                  </a:lnTo>
+                  <a:lnTo>
+                    <a:pt x="1808137" y="1685"/>
+                  </a:lnTo>
+                  <a:lnTo>
+                    <a:pt x="2066443" y="0"/>
+                  </a:lnTo>
+                  <a:lnTo>
+                    <a:pt x="2324748" y="110474"/>
+                  </a:lnTo>
+                  <a:lnTo>
+                    <a:pt x="2583054" y="106152"/>
+                  </a:lnTo>
+                  <a:lnTo>
+                    <a:pt x="2841359" y="124892"/>
+                  </a:lnTo>
+                  <a:lnTo>
+                    <a:pt x="3099664" y="88763"/>
+                  </a:lnTo>
+                  <a:lnTo>
+                    <a:pt x="3357970" y="133487"/>
+                  </a:lnTo>
+                  <a:lnTo>
+                    <a:pt x="3616275" y="133070"/>
+                  </a:lnTo>
+                  <a:lnTo>
+                    <a:pt x="3874581" y="204261"/>
+                  </a:lnTo>
+                </a:path>
+              </a:pathLst>
+            </a:custGeom>
+            <a:ln w="35231" cap="flat">
+              <a:solidFill>
+                <a:srgbClr val="F0C419">
+                  <a:alpha val="100000"/>
+                </a:srgbClr>
+              </a:solidFill>
+              <a:prstDash val="solid"/>
+              <a:round/>
+            </a:ln>
+          </p:spPr>
+          <p:txBody>
+            <a:bodyPr/>
+            <a:lstStyle/>
+            <a:p/>
+          </p:txBody>
+        </p:sp>
+        <p:sp>
+          <p:nvSpPr>
+            <p:cNvPr id="24" name="pl24"/>
+            <p:cNvSpPr/>
+            <p:nvPr/>
+          </p:nvSpPr>
+          <p:spPr>
+            <a:xfrm>
+              <a:off x="1523491" y="2932173"/>
+              <a:ext cx="3874581" cy="296800"/>
+            </a:xfrm>
+            <a:custGeom>
+              <a:avLst/>
+              <a:pathLst>
+                <a:path w="3874581" h="296800">
+                  <a:moveTo>
+                    <a:pt x="0" y="296800"/>
+                  </a:moveTo>
+                  <a:lnTo>
+                    <a:pt x="258305" y="276109"/>
+                  </a:lnTo>
+                  <a:lnTo>
+                    <a:pt x="516610" y="236655"/>
+                  </a:lnTo>
+                  <a:lnTo>
+                    <a:pt x="774916" y="204570"/>
+                  </a:lnTo>
+                  <a:lnTo>
+                    <a:pt x="1033221" y="198063"/>
+                  </a:lnTo>
+                  <a:lnTo>
+                    <a:pt x="1291527" y="183955"/>
+                  </a:lnTo>
+                  <a:lnTo>
+                    <a:pt x="1549832" y="71870"/>
+                  </a:lnTo>
+                  <a:lnTo>
+                    <a:pt x="1808137" y="82537"/>
+                  </a:lnTo>
+                  <a:lnTo>
+                    <a:pt x="2066443" y="131680"/>
+                  </a:lnTo>
+                  <a:lnTo>
+                    <a:pt x="2324748" y="160495"/>
+                  </a:lnTo>
+                  <a:lnTo>
+                    <a:pt x="2583054" y="175451"/>
+                  </a:lnTo>
+                  <a:lnTo>
+                    <a:pt x="2841359" y="156096"/>
+                  </a:lnTo>
+                  <a:lnTo>
+                    <a:pt x="3099664" y="103141"/>
+                  </a:lnTo>
+                  <a:lnTo>
+                    <a:pt x="3357970" y="87758"/>
+                  </a:lnTo>
+                  <a:lnTo>
+                    <a:pt x="3616275" y="0"/>
+                  </a:lnTo>
+                  <a:lnTo>
+                    <a:pt x="3874581" y="75803"/>
+                  </a:lnTo>
+                </a:path>
+              </a:pathLst>
+            </a:custGeom>
+            <a:ln w="35231" cap="flat">
+              <a:solidFill>
                 <a:srgbClr val="D2B48C">
                   <a:alpha val="100000"/>
                 </a:srgbClr>
@@ -3221,13 +3385,13 @@
         </p:sp>
         <p:sp>
           <p:nvSpPr>
-            <p:cNvPr id="23" name="pt23"/>
-            <p:cNvSpPr/>
-            <p:nvPr/>
-          </p:nvSpPr>
-          <p:spPr>
-            <a:xfrm>
-              <a:off x="1530868" y="3723987"/>
+            <p:cNvPr id="25" name="pt25"/>
+            <p:cNvSpPr/>
+            <p:nvPr/>
+          </p:nvSpPr>
+          <p:spPr>
+            <a:xfrm>
+              <a:off x="1486316" y="3902095"/>
               <a:ext cx="74350" cy="74350"/>
             </a:xfrm>
             <a:prstGeom prst="ellipse">
@@ -3256,13 +3420,13 @@
         </p:sp>
         <p:sp>
           <p:nvSpPr>
-            <p:cNvPr id="24" name="pt24"/>
-            <p:cNvSpPr/>
-            <p:nvPr/>
-          </p:nvSpPr>
-          <p:spPr>
-            <a:xfrm>
-              <a:off x="1848576" y="3752675"/>
+            <p:cNvPr id="26" name="pt26"/>
+            <p:cNvSpPr/>
+            <p:nvPr/>
+          </p:nvSpPr>
+          <p:spPr>
+            <a:xfrm>
+              <a:off x="1744621" y="3927709"/>
               <a:ext cx="74350" cy="74350"/>
             </a:xfrm>
             <a:prstGeom prst="ellipse">
@@ -3291,13 +3455,13 @@
         </p:sp>
         <p:sp>
           <p:nvSpPr>
-            <p:cNvPr id="25" name="pt25"/>
-            <p:cNvSpPr/>
-            <p:nvPr/>
-          </p:nvSpPr>
-          <p:spPr>
-            <a:xfrm>
-              <a:off x="2166284" y="3770060"/>
+            <p:cNvPr id="27" name="pt27"/>
+            <p:cNvSpPr/>
+            <p:nvPr/>
+          </p:nvSpPr>
+          <p:spPr>
+            <a:xfrm>
+              <a:off x="2002927" y="3943232"/>
               <a:ext cx="74350" cy="74350"/>
             </a:xfrm>
             <a:prstGeom prst="ellipse">
@@ -3326,13 +3490,13 @@
         </p:sp>
         <p:sp>
           <p:nvSpPr>
-            <p:cNvPr id="26" name="pt26"/>
-            <p:cNvSpPr/>
-            <p:nvPr/>
-          </p:nvSpPr>
-          <p:spPr>
-            <a:xfrm>
-              <a:off x="2483993" y="3761451"/>
+            <p:cNvPr id="28" name="pt28"/>
+            <p:cNvSpPr/>
+            <p:nvPr/>
+          </p:nvSpPr>
+          <p:spPr>
+            <a:xfrm>
+              <a:off x="2261232" y="3935545"/>
               <a:ext cx="74350" cy="74350"/>
             </a:xfrm>
             <a:prstGeom prst="ellipse">
@@ -3361,13 +3525,13 @@
         </p:sp>
         <p:sp>
           <p:nvSpPr>
-            <p:cNvPr id="27" name="pt27"/>
-            <p:cNvSpPr/>
-            <p:nvPr/>
-          </p:nvSpPr>
-          <p:spPr>
-            <a:xfrm>
-              <a:off x="2801701" y="3915691"/>
+            <p:cNvPr id="29" name="pt29"/>
+            <p:cNvSpPr/>
+            <p:nvPr/>
+          </p:nvSpPr>
+          <p:spPr>
+            <a:xfrm>
+              <a:off x="2519538" y="4073259"/>
               <a:ext cx="74350" cy="74350"/>
             </a:xfrm>
             <a:prstGeom prst="ellipse">
@@ -3396,13 +3560,13 @@
         </p:sp>
         <p:sp>
           <p:nvSpPr>
-            <p:cNvPr id="28" name="pt28"/>
-            <p:cNvSpPr/>
-            <p:nvPr/>
-          </p:nvSpPr>
-          <p:spPr>
-            <a:xfrm>
-              <a:off x="3119409" y="3902409"/>
+            <p:cNvPr id="30" name="pt30"/>
+            <p:cNvSpPr/>
+            <p:nvPr/>
+          </p:nvSpPr>
+          <p:spPr>
+            <a:xfrm>
+              <a:off x="2777843" y="4061401"/>
               <a:ext cx="74350" cy="74350"/>
             </a:xfrm>
             <a:prstGeom prst="ellipse">
@@ -3431,13 +3595,13 @@
         </p:sp>
         <p:sp>
           <p:nvSpPr>
-            <p:cNvPr id="29" name="pt29"/>
-            <p:cNvSpPr/>
-            <p:nvPr/>
-          </p:nvSpPr>
-          <p:spPr>
-            <a:xfrm>
-              <a:off x="3437117" y="3463991"/>
+            <p:cNvPr id="31" name="pt31"/>
+            <p:cNvSpPr/>
+            <p:nvPr/>
+          </p:nvSpPr>
+          <p:spPr>
+            <a:xfrm>
+              <a:off x="3036148" y="3669956"/>
               <a:ext cx="74350" cy="74350"/>
             </a:xfrm>
             <a:prstGeom prst="ellipse">
@@ -3466,13 +3630,13 @@
         </p:sp>
         <p:sp>
           <p:nvSpPr>
-            <p:cNvPr id="30" name="pt30"/>
-            <p:cNvSpPr/>
-            <p:nvPr/>
-          </p:nvSpPr>
-          <p:spPr>
-            <a:xfrm>
-              <a:off x="3754825" y="3470987"/>
+            <p:cNvPr id="32" name="pt32"/>
+            <p:cNvSpPr/>
+            <p:nvPr/>
+          </p:nvSpPr>
+          <p:spPr>
+            <a:xfrm>
+              <a:off x="3294454" y="3676202"/>
               <a:ext cx="74350" cy="74350"/>
             </a:xfrm>
             <a:prstGeom prst="ellipse">
@@ -3501,13 +3665,13 @@
         </p:sp>
         <p:sp>
           <p:nvSpPr>
-            <p:cNvPr id="31" name="pt31"/>
-            <p:cNvSpPr/>
-            <p:nvPr/>
-          </p:nvSpPr>
-          <p:spPr>
-            <a:xfrm>
-              <a:off x="4072533" y="3583449"/>
+            <p:cNvPr id="33" name="pt33"/>
+            <p:cNvSpPr/>
+            <p:nvPr/>
+          </p:nvSpPr>
+          <p:spPr>
+            <a:xfrm>
+              <a:off x="3552759" y="3776615"/>
               <a:ext cx="74350" cy="74350"/>
             </a:xfrm>
             <a:prstGeom prst="ellipse">
@@ -3536,13 +3700,13 @@
         </p:sp>
         <p:sp>
           <p:nvSpPr>
-            <p:cNvPr id="32" name="pt32"/>
-            <p:cNvSpPr/>
-            <p:nvPr/>
-          </p:nvSpPr>
-          <p:spPr>
-            <a:xfrm>
-              <a:off x="4390241" y="3682265"/>
+            <p:cNvPr id="34" name="pt34"/>
+            <p:cNvSpPr/>
+            <p:nvPr/>
+          </p:nvSpPr>
+          <p:spPr>
+            <a:xfrm>
+              <a:off x="3811065" y="3864843"/>
               <a:ext cx="74350" cy="74350"/>
             </a:xfrm>
             <a:prstGeom prst="ellipse">
@@ -3571,13 +3735,13 @@
         </p:sp>
         <p:sp>
           <p:nvSpPr>
-            <p:cNvPr id="33" name="pt33"/>
-            <p:cNvSpPr/>
-            <p:nvPr/>
-          </p:nvSpPr>
-          <p:spPr>
-            <a:xfrm>
-              <a:off x="4707950" y="3890779"/>
+            <p:cNvPr id="35" name="pt35"/>
+            <p:cNvSpPr/>
+            <p:nvPr/>
+          </p:nvSpPr>
+          <p:spPr>
+            <a:xfrm>
+              <a:off x="4069370" y="4051016"/>
               <a:ext cx="74350" cy="74350"/>
             </a:xfrm>
             <a:prstGeom prst="ellipse">
@@ -3606,13 +3770,13 @@
         </p:sp>
         <p:sp>
           <p:nvSpPr>
-            <p:cNvPr id="34" name="pt34"/>
-            <p:cNvSpPr/>
-            <p:nvPr/>
-          </p:nvSpPr>
-          <p:spPr>
-            <a:xfrm>
-              <a:off x="5025658" y="3914749"/>
+            <p:cNvPr id="36" name="pt36"/>
+            <p:cNvSpPr/>
+            <p:nvPr/>
+          </p:nvSpPr>
+          <p:spPr>
+            <a:xfrm>
+              <a:off x="4327675" y="4072418"/>
               <a:ext cx="74350" cy="74350"/>
             </a:xfrm>
             <a:prstGeom prst="ellipse">
@@ -3641,13 +3805,13 @@
         </p:sp>
         <p:sp>
           <p:nvSpPr>
-            <p:cNvPr id="35" name="pt35"/>
-            <p:cNvSpPr/>
-            <p:nvPr/>
-          </p:nvSpPr>
-          <p:spPr>
-            <a:xfrm>
-              <a:off x="5343366" y="3737572"/>
+            <p:cNvPr id="37" name="pt37"/>
+            <p:cNvSpPr/>
+            <p:nvPr/>
+          </p:nvSpPr>
+          <p:spPr>
+            <a:xfrm>
+              <a:off x="4585981" y="3914225"/>
               <a:ext cx="74350" cy="74350"/>
             </a:xfrm>
             <a:prstGeom prst="ellipse">
@@ -3676,13 +3840,13 @@
         </p:sp>
         <p:sp>
           <p:nvSpPr>
-            <p:cNvPr id="36" name="pt36"/>
-            <p:cNvSpPr/>
-            <p:nvPr/>
-          </p:nvSpPr>
-          <p:spPr>
-            <a:xfrm>
-              <a:off x="5661074" y="3505492"/>
+            <p:cNvPr id="38" name="pt38"/>
+            <p:cNvSpPr/>
+            <p:nvPr/>
+          </p:nvSpPr>
+          <p:spPr>
+            <a:xfrm>
+              <a:off x="4844286" y="3707010"/>
               <a:ext cx="74350" cy="74350"/>
             </a:xfrm>
             <a:prstGeom prst="ellipse">
@@ -3711,13 +3875,13 @@
         </p:sp>
         <p:sp>
           <p:nvSpPr>
-            <p:cNvPr id="37" name="pt37"/>
-            <p:cNvSpPr/>
-            <p:nvPr/>
-          </p:nvSpPr>
-          <p:spPr>
-            <a:xfrm>
-              <a:off x="5978782" y="3259391"/>
+            <p:cNvPr id="39" name="pt39"/>
+            <p:cNvSpPr/>
+            <p:nvPr/>
+          </p:nvSpPr>
+          <p:spPr>
+            <a:xfrm>
+              <a:off x="5102592" y="3487277"/>
               <a:ext cx="74350" cy="74350"/>
             </a:xfrm>
             <a:prstGeom prst="ellipse">
@@ -3746,13 +3910,13 @@
         </p:sp>
         <p:sp>
           <p:nvSpPr>
-            <p:cNvPr id="38" name="pt38"/>
-            <p:cNvSpPr/>
-            <p:nvPr/>
-          </p:nvSpPr>
-          <p:spPr>
-            <a:xfrm>
-              <a:off x="6296490" y="3200948"/>
+            <p:cNvPr id="40" name="pt40"/>
+            <p:cNvSpPr/>
+            <p:nvPr/>
+          </p:nvSpPr>
+          <p:spPr>
+            <a:xfrm>
+              <a:off x="5360897" y="3435095"/>
               <a:ext cx="74350" cy="74350"/>
             </a:xfrm>
             <a:prstGeom prst="ellipse">
@@ -3781,13 +3945,1133 @@
         </p:sp>
         <p:sp>
           <p:nvSpPr>
-            <p:cNvPr id="39" name="pt39"/>
-            <p:cNvSpPr/>
-            <p:nvPr/>
-          </p:nvSpPr>
-          <p:spPr>
-            <a:xfrm>
-              <a:off x="1530868" y="2928455"/>
+            <p:cNvPr id="41" name="pt41"/>
+            <p:cNvSpPr/>
+            <p:nvPr/>
+          </p:nvSpPr>
+          <p:spPr>
+            <a:xfrm>
+              <a:off x="1486316" y="2734788"/>
+              <a:ext cx="74350" cy="74350"/>
+            </a:xfrm>
+            <a:prstGeom prst="ellipse">
+              <a:avLst/>
+            </a:prstGeom>
+            <a:solidFill>
+              <a:srgbClr val="F0C419">
+                <a:alpha val="100000"/>
+              </a:srgbClr>
+            </a:solidFill>
+            <a:ln w="14727" cap="rnd">
+              <a:solidFill>
+                <a:srgbClr val="F0C419">
+                  <a:alpha val="100000"/>
+                </a:srgbClr>
+              </a:solidFill>
+              <a:prstDash val="solid"/>
+              <a:round/>
+            </a:ln>
+          </p:spPr>
+          <p:txBody>
+            <a:bodyPr/>
+            <a:lstStyle/>
+            <a:p/>
+          </p:txBody>
+        </p:sp>
+        <p:sp>
+          <p:nvSpPr>
+            <p:cNvPr id="42" name="pt42"/>
+            <p:cNvSpPr/>
+            <p:nvPr/>
+          </p:nvSpPr>
+          <p:spPr>
+            <a:xfrm>
+              <a:off x="1744621" y="2695671"/>
+              <a:ext cx="74350" cy="74350"/>
+            </a:xfrm>
+            <a:prstGeom prst="ellipse">
+              <a:avLst/>
+            </a:prstGeom>
+            <a:solidFill>
+              <a:srgbClr val="F0C419">
+                <a:alpha val="100000"/>
+              </a:srgbClr>
+            </a:solidFill>
+            <a:ln w="14727" cap="rnd">
+              <a:solidFill>
+                <a:srgbClr val="F0C419">
+                  <a:alpha val="100000"/>
+                </a:srgbClr>
+              </a:solidFill>
+              <a:prstDash val="solid"/>
+              <a:round/>
+            </a:ln>
+          </p:spPr>
+          <p:txBody>
+            <a:bodyPr/>
+            <a:lstStyle/>
+            <a:p/>
+          </p:txBody>
+        </p:sp>
+        <p:sp>
+          <p:nvSpPr>
+            <p:cNvPr id="43" name="pt43"/>
+            <p:cNvSpPr/>
+            <p:nvPr/>
+          </p:nvSpPr>
+          <p:spPr>
+            <a:xfrm>
+              <a:off x="2002927" y="2658874"/>
+              <a:ext cx="74350" cy="74350"/>
+            </a:xfrm>
+            <a:prstGeom prst="ellipse">
+              <a:avLst/>
+            </a:prstGeom>
+            <a:solidFill>
+              <a:srgbClr val="F0C419">
+                <a:alpha val="100000"/>
+              </a:srgbClr>
+            </a:solidFill>
+            <a:ln w="14727" cap="rnd">
+              <a:solidFill>
+                <a:srgbClr val="F0C419">
+                  <a:alpha val="100000"/>
+                </a:srgbClr>
+              </a:solidFill>
+              <a:prstDash val="solid"/>
+              <a:round/>
+            </a:ln>
+          </p:spPr>
+          <p:txBody>
+            <a:bodyPr/>
+            <a:lstStyle/>
+            <a:p/>
+          </p:txBody>
+        </p:sp>
+        <p:sp>
+          <p:nvSpPr>
+            <p:cNvPr id="44" name="pt44"/>
+            <p:cNvSpPr/>
+            <p:nvPr/>
+          </p:nvSpPr>
+          <p:spPr>
+            <a:xfrm>
+              <a:off x="2261232" y="2626366"/>
+              <a:ext cx="74350" cy="74350"/>
+            </a:xfrm>
+            <a:prstGeom prst="ellipse">
+              <a:avLst/>
+            </a:prstGeom>
+            <a:solidFill>
+              <a:srgbClr val="F0C419">
+                <a:alpha val="100000"/>
+              </a:srgbClr>
+            </a:solidFill>
+            <a:ln w="14727" cap="rnd">
+              <a:solidFill>
+                <a:srgbClr val="F0C419">
+                  <a:alpha val="100000"/>
+                </a:srgbClr>
+              </a:solidFill>
+              <a:prstDash val="solid"/>
+              <a:round/>
+            </a:ln>
+          </p:spPr>
+          <p:txBody>
+            <a:bodyPr/>
+            <a:lstStyle/>
+            <a:p/>
+          </p:txBody>
+        </p:sp>
+        <p:sp>
+          <p:nvSpPr>
+            <p:cNvPr id="45" name="pt45"/>
+            <p:cNvSpPr/>
+            <p:nvPr/>
+          </p:nvSpPr>
+          <p:spPr>
+            <a:xfrm>
+              <a:off x="2519538" y="2613383"/>
+              <a:ext cx="74350" cy="74350"/>
+            </a:xfrm>
+            <a:prstGeom prst="ellipse">
+              <a:avLst/>
+            </a:prstGeom>
+            <a:solidFill>
+              <a:srgbClr val="F0C419">
+                <a:alpha val="100000"/>
+              </a:srgbClr>
+            </a:solidFill>
+            <a:ln w="14727" cap="rnd">
+              <a:solidFill>
+                <a:srgbClr val="F0C419">
+                  <a:alpha val="100000"/>
+                </a:srgbClr>
+              </a:solidFill>
+              <a:prstDash val="solid"/>
+              <a:round/>
+            </a:ln>
+          </p:spPr>
+          <p:txBody>
+            <a:bodyPr/>
+            <a:lstStyle/>
+            <a:p/>
+          </p:txBody>
+        </p:sp>
+        <p:sp>
+          <p:nvSpPr>
+            <p:cNvPr id="46" name="pt46"/>
+            <p:cNvSpPr/>
+            <p:nvPr/>
+          </p:nvSpPr>
+          <p:spPr>
+            <a:xfrm>
+              <a:off x="2777843" y="2602018"/>
+              <a:ext cx="74350" cy="74350"/>
+            </a:xfrm>
+            <a:prstGeom prst="ellipse">
+              <a:avLst/>
+            </a:prstGeom>
+            <a:solidFill>
+              <a:srgbClr val="F0C419">
+                <a:alpha val="100000"/>
+              </a:srgbClr>
+            </a:solidFill>
+            <a:ln w="14727" cap="rnd">
+              <a:solidFill>
+                <a:srgbClr val="F0C419">
+                  <a:alpha val="100000"/>
+                </a:srgbClr>
+              </a:solidFill>
+              <a:prstDash val="solid"/>
+              <a:round/>
+            </a:ln>
+          </p:spPr>
+          <p:txBody>
+            <a:bodyPr/>
+            <a:lstStyle/>
+            <a:p/>
+          </p:txBody>
+        </p:sp>
+        <p:sp>
+          <p:nvSpPr>
+            <p:cNvPr id="47" name="pt47"/>
+            <p:cNvSpPr/>
+            <p:nvPr/>
+          </p:nvSpPr>
+          <p:spPr>
+            <a:xfrm>
+              <a:off x="3036148" y="2531077"/>
+              <a:ext cx="74350" cy="74350"/>
+            </a:xfrm>
+            <a:prstGeom prst="ellipse">
+              <a:avLst/>
+            </a:prstGeom>
+            <a:solidFill>
+              <a:srgbClr val="F0C419">
+                <a:alpha val="100000"/>
+              </a:srgbClr>
+            </a:solidFill>
+            <a:ln w="14727" cap="rnd">
+              <a:solidFill>
+                <a:srgbClr val="F0C419">
+                  <a:alpha val="100000"/>
+                </a:srgbClr>
+              </a:solidFill>
+              <a:prstDash val="solid"/>
+              <a:round/>
+            </a:ln>
+          </p:spPr>
+          <p:txBody>
+            <a:bodyPr/>
+            <a:lstStyle/>
+            <a:p/>
+          </p:txBody>
+        </p:sp>
+        <p:sp>
+          <p:nvSpPr>
+            <p:cNvPr id="48" name="pt48"/>
+            <p:cNvSpPr/>
+            <p:nvPr/>
+          </p:nvSpPr>
+          <p:spPr>
+            <a:xfrm>
+              <a:off x="3294454" y="2525053"/>
+              <a:ext cx="74350" cy="74350"/>
+            </a:xfrm>
+            <a:prstGeom prst="ellipse">
+              <a:avLst/>
+            </a:prstGeom>
+            <a:solidFill>
+              <a:srgbClr val="F0C419">
+                <a:alpha val="100000"/>
+              </a:srgbClr>
+            </a:solidFill>
+            <a:ln w="14727" cap="rnd">
+              <a:solidFill>
+                <a:srgbClr val="F0C419">
+                  <a:alpha val="100000"/>
+                </a:srgbClr>
+              </a:solidFill>
+              <a:prstDash val="solid"/>
+              <a:round/>
+            </a:ln>
+          </p:spPr>
+          <p:txBody>
+            <a:bodyPr/>
+            <a:lstStyle/>
+            <a:p/>
+          </p:txBody>
+        </p:sp>
+        <p:sp>
+          <p:nvSpPr>
+            <p:cNvPr id="49" name="pt49"/>
+            <p:cNvSpPr/>
+            <p:nvPr/>
+          </p:nvSpPr>
+          <p:spPr>
+            <a:xfrm>
+              <a:off x="3552759" y="2523368"/>
+              <a:ext cx="74350" cy="74350"/>
+            </a:xfrm>
+            <a:prstGeom prst="ellipse">
+              <a:avLst/>
+            </a:prstGeom>
+            <a:solidFill>
+              <a:srgbClr val="F0C419">
+                <a:alpha val="100000"/>
+              </a:srgbClr>
+            </a:solidFill>
+            <a:ln w="14727" cap="rnd">
+              <a:solidFill>
+                <a:srgbClr val="F0C419">
+                  <a:alpha val="100000"/>
+                </a:srgbClr>
+              </a:solidFill>
+              <a:prstDash val="solid"/>
+              <a:round/>
+            </a:ln>
+          </p:spPr>
+          <p:txBody>
+            <a:bodyPr/>
+            <a:lstStyle/>
+            <a:p/>
+          </p:txBody>
+        </p:sp>
+        <p:sp>
+          <p:nvSpPr>
+            <p:cNvPr id="50" name="pt50"/>
+            <p:cNvSpPr/>
+            <p:nvPr/>
+          </p:nvSpPr>
+          <p:spPr>
+            <a:xfrm>
+              <a:off x="3811065" y="2633842"/>
+              <a:ext cx="74350" cy="74350"/>
+            </a:xfrm>
+            <a:prstGeom prst="ellipse">
+              <a:avLst/>
+            </a:prstGeom>
+            <a:solidFill>
+              <a:srgbClr val="F0C419">
+                <a:alpha val="100000"/>
+              </a:srgbClr>
+            </a:solidFill>
+            <a:ln w="14727" cap="rnd">
+              <a:solidFill>
+                <a:srgbClr val="F0C419">
+                  <a:alpha val="100000"/>
+                </a:srgbClr>
+              </a:solidFill>
+              <a:prstDash val="solid"/>
+              <a:round/>
+            </a:ln>
+          </p:spPr>
+          <p:txBody>
+            <a:bodyPr/>
+            <a:lstStyle/>
+            <a:p/>
+          </p:txBody>
+        </p:sp>
+        <p:sp>
+          <p:nvSpPr>
+            <p:cNvPr id="51" name="pt51"/>
+            <p:cNvSpPr/>
+            <p:nvPr/>
+          </p:nvSpPr>
+          <p:spPr>
+            <a:xfrm>
+              <a:off x="4069370" y="2629520"/>
+              <a:ext cx="74350" cy="74350"/>
+            </a:xfrm>
+            <a:prstGeom prst="ellipse">
+              <a:avLst/>
+            </a:prstGeom>
+            <a:solidFill>
+              <a:srgbClr val="F0C419">
+                <a:alpha val="100000"/>
+              </a:srgbClr>
+            </a:solidFill>
+            <a:ln w="14727" cap="rnd">
+              <a:solidFill>
+                <a:srgbClr val="F0C419">
+                  <a:alpha val="100000"/>
+                </a:srgbClr>
+              </a:solidFill>
+              <a:prstDash val="solid"/>
+              <a:round/>
+            </a:ln>
+          </p:spPr>
+          <p:txBody>
+            <a:bodyPr/>
+            <a:lstStyle/>
+            <a:p/>
+          </p:txBody>
+        </p:sp>
+        <p:sp>
+          <p:nvSpPr>
+            <p:cNvPr id="52" name="pt52"/>
+            <p:cNvSpPr/>
+            <p:nvPr/>
+          </p:nvSpPr>
+          <p:spPr>
+            <a:xfrm>
+              <a:off x="4327675" y="2648261"/>
+              <a:ext cx="74350" cy="74350"/>
+            </a:xfrm>
+            <a:prstGeom prst="ellipse">
+              <a:avLst/>
+            </a:prstGeom>
+            <a:solidFill>
+              <a:srgbClr val="F0C419">
+                <a:alpha val="100000"/>
+              </a:srgbClr>
+            </a:solidFill>
+            <a:ln w="14727" cap="rnd">
+              <a:solidFill>
+                <a:srgbClr val="F0C419">
+                  <a:alpha val="100000"/>
+                </a:srgbClr>
+              </a:solidFill>
+              <a:prstDash val="solid"/>
+              <a:round/>
+            </a:ln>
+          </p:spPr>
+          <p:txBody>
+            <a:bodyPr/>
+            <a:lstStyle/>
+            <a:p/>
+          </p:txBody>
+        </p:sp>
+        <p:sp>
+          <p:nvSpPr>
+            <p:cNvPr id="53" name="pt53"/>
+            <p:cNvSpPr/>
+            <p:nvPr/>
+          </p:nvSpPr>
+          <p:spPr>
+            <a:xfrm>
+              <a:off x="4585981" y="2612131"/>
+              <a:ext cx="74350" cy="74350"/>
+            </a:xfrm>
+            <a:prstGeom prst="ellipse">
+              <a:avLst/>
+            </a:prstGeom>
+            <a:solidFill>
+              <a:srgbClr val="F0C419">
+                <a:alpha val="100000"/>
+              </a:srgbClr>
+            </a:solidFill>
+            <a:ln w="14727" cap="rnd">
+              <a:solidFill>
+                <a:srgbClr val="F0C419">
+                  <a:alpha val="100000"/>
+                </a:srgbClr>
+              </a:solidFill>
+              <a:prstDash val="solid"/>
+              <a:round/>
+            </a:ln>
+          </p:spPr>
+          <p:txBody>
+            <a:bodyPr/>
+            <a:lstStyle/>
+            <a:p/>
+          </p:txBody>
+        </p:sp>
+        <p:sp>
+          <p:nvSpPr>
+            <p:cNvPr id="54" name="pt54"/>
+            <p:cNvSpPr/>
+            <p:nvPr/>
+          </p:nvSpPr>
+          <p:spPr>
+            <a:xfrm>
+              <a:off x="4844286" y="2656855"/>
+              <a:ext cx="74350" cy="74350"/>
+            </a:xfrm>
+            <a:prstGeom prst="ellipse">
+              <a:avLst/>
+            </a:prstGeom>
+            <a:solidFill>
+              <a:srgbClr val="F0C419">
+                <a:alpha val="100000"/>
+              </a:srgbClr>
+            </a:solidFill>
+            <a:ln w="14727" cap="rnd">
+              <a:solidFill>
+                <a:srgbClr val="F0C419">
+                  <a:alpha val="100000"/>
+                </a:srgbClr>
+              </a:solidFill>
+              <a:prstDash val="solid"/>
+              <a:round/>
+            </a:ln>
+          </p:spPr>
+          <p:txBody>
+            <a:bodyPr/>
+            <a:lstStyle/>
+            <a:p/>
+          </p:txBody>
+        </p:sp>
+        <p:sp>
+          <p:nvSpPr>
+            <p:cNvPr id="55" name="pt55"/>
+            <p:cNvSpPr/>
+            <p:nvPr/>
+          </p:nvSpPr>
+          <p:spPr>
+            <a:xfrm>
+              <a:off x="5102592" y="2656438"/>
+              <a:ext cx="74350" cy="74350"/>
+            </a:xfrm>
+            <a:prstGeom prst="ellipse">
+              <a:avLst/>
+            </a:prstGeom>
+            <a:solidFill>
+              <a:srgbClr val="F0C419">
+                <a:alpha val="100000"/>
+              </a:srgbClr>
+            </a:solidFill>
+            <a:ln w="14727" cap="rnd">
+              <a:solidFill>
+                <a:srgbClr val="F0C419">
+                  <a:alpha val="100000"/>
+                </a:srgbClr>
+              </a:solidFill>
+              <a:prstDash val="solid"/>
+              <a:round/>
+            </a:ln>
+          </p:spPr>
+          <p:txBody>
+            <a:bodyPr/>
+            <a:lstStyle/>
+            <a:p/>
+          </p:txBody>
+        </p:sp>
+        <p:sp>
+          <p:nvSpPr>
+            <p:cNvPr id="56" name="pt56"/>
+            <p:cNvSpPr/>
+            <p:nvPr/>
+          </p:nvSpPr>
+          <p:spPr>
+            <a:xfrm>
+              <a:off x="5360897" y="2727629"/>
+              <a:ext cx="74350" cy="74350"/>
+            </a:xfrm>
+            <a:prstGeom prst="ellipse">
+              <a:avLst/>
+            </a:prstGeom>
+            <a:solidFill>
+              <a:srgbClr val="F0C419">
+                <a:alpha val="100000"/>
+              </a:srgbClr>
+            </a:solidFill>
+            <a:ln w="14727" cap="rnd">
+              <a:solidFill>
+                <a:srgbClr val="F0C419">
+                  <a:alpha val="100000"/>
+                </a:srgbClr>
+              </a:solidFill>
+              <a:prstDash val="solid"/>
+              <a:round/>
+            </a:ln>
+          </p:spPr>
+          <p:txBody>
+            <a:bodyPr/>
+            <a:lstStyle/>
+            <a:p/>
+          </p:txBody>
+        </p:sp>
+        <p:sp>
+          <p:nvSpPr>
+            <p:cNvPr id="57" name="pt57"/>
+            <p:cNvSpPr/>
+            <p:nvPr/>
+          </p:nvSpPr>
+          <p:spPr>
+            <a:xfrm>
+              <a:off x="1486316" y="3141708"/>
+              <a:ext cx="74350" cy="74350"/>
+            </a:xfrm>
+            <a:prstGeom prst="ellipse">
+              <a:avLst/>
+            </a:prstGeom>
+            <a:solidFill>
+              <a:srgbClr val="E7298A">
+                <a:alpha val="100000"/>
+              </a:srgbClr>
+            </a:solidFill>
+            <a:ln w="14727" cap="rnd">
+              <a:solidFill>
+                <a:srgbClr val="E7298A">
+                  <a:alpha val="100000"/>
+                </a:srgbClr>
+              </a:solidFill>
+              <a:prstDash val="solid"/>
+              <a:round/>
+            </a:ln>
+          </p:spPr>
+          <p:txBody>
+            <a:bodyPr/>
+            <a:lstStyle/>
+            <a:p/>
+          </p:txBody>
+        </p:sp>
+        <p:sp>
+          <p:nvSpPr>
+            <p:cNvPr id="58" name="pt58"/>
+            <p:cNvSpPr/>
+            <p:nvPr/>
+          </p:nvSpPr>
+          <p:spPr>
+            <a:xfrm>
+              <a:off x="1744621" y="3126466"/>
+              <a:ext cx="74350" cy="74350"/>
+            </a:xfrm>
+            <a:prstGeom prst="ellipse">
+              <a:avLst/>
+            </a:prstGeom>
+            <a:solidFill>
+              <a:srgbClr val="E7298A">
+                <a:alpha val="100000"/>
+              </a:srgbClr>
+            </a:solidFill>
+            <a:ln w="14727" cap="rnd">
+              <a:solidFill>
+                <a:srgbClr val="E7298A">
+                  <a:alpha val="100000"/>
+                </a:srgbClr>
+              </a:solidFill>
+              <a:prstDash val="solid"/>
+              <a:round/>
+            </a:ln>
+          </p:spPr>
+          <p:txBody>
+            <a:bodyPr/>
+            <a:lstStyle/>
+            <a:p/>
+          </p:txBody>
+        </p:sp>
+        <p:sp>
+          <p:nvSpPr>
+            <p:cNvPr id="59" name="pt59"/>
+            <p:cNvSpPr/>
+            <p:nvPr/>
+          </p:nvSpPr>
+          <p:spPr>
+            <a:xfrm>
+              <a:off x="2002927" y="3081029"/>
+              <a:ext cx="74350" cy="74350"/>
+            </a:xfrm>
+            <a:prstGeom prst="ellipse">
+              <a:avLst/>
+            </a:prstGeom>
+            <a:solidFill>
+              <a:srgbClr val="E7298A">
+                <a:alpha val="100000"/>
+              </a:srgbClr>
+            </a:solidFill>
+            <a:ln w="14727" cap="rnd">
+              <a:solidFill>
+                <a:srgbClr val="E7298A">
+                  <a:alpha val="100000"/>
+                </a:srgbClr>
+              </a:solidFill>
+              <a:prstDash val="solid"/>
+              <a:round/>
+            </a:ln>
+          </p:spPr>
+          <p:txBody>
+            <a:bodyPr/>
+            <a:lstStyle/>
+            <a:p/>
+          </p:txBody>
+        </p:sp>
+        <p:sp>
+          <p:nvSpPr>
+            <p:cNvPr id="60" name="pt60"/>
+            <p:cNvSpPr/>
+            <p:nvPr/>
+          </p:nvSpPr>
+          <p:spPr>
+            <a:xfrm>
+              <a:off x="2261232" y="3034897"/>
+              <a:ext cx="74350" cy="74350"/>
+            </a:xfrm>
+            <a:prstGeom prst="ellipse">
+              <a:avLst/>
+            </a:prstGeom>
+            <a:solidFill>
+              <a:srgbClr val="E7298A">
+                <a:alpha val="100000"/>
+              </a:srgbClr>
+            </a:solidFill>
+            <a:ln w="14727" cap="rnd">
+              <a:solidFill>
+                <a:srgbClr val="E7298A">
+                  <a:alpha val="100000"/>
+                </a:srgbClr>
+              </a:solidFill>
+              <a:prstDash val="solid"/>
+              <a:round/>
+            </a:ln>
+          </p:spPr>
+          <p:txBody>
+            <a:bodyPr/>
+            <a:lstStyle/>
+            <a:p/>
+          </p:txBody>
+        </p:sp>
+        <p:sp>
+          <p:nvSpPr>
+            <p:cNvPr id="61" name="pt61"/>
+            <p:cNvSpPr/>
+            <p:nvPr/>
+          </p:nvSpPr>
+          <p:spPr>
+            <a:xfrm>
+              <a:off x="2519538" y="3071025"/>
+              <a:ext cx="74350" cy="74350"/>
+            </a:xfrm>
+            <a:prstGeom prst="ellipse">
+              <a:avLst/>
+            </a:prstGeom>
+            <a:solidFill>
+              <a:srgbClr val="E7298A">
+                <a:alpha val="100000"/>
+              </a:srgbClr>
+            </a:solidFill>
+            <a:ln w="14727" cap="rnd">
+              <a:solidFill>
+                <a:srgbClr val="E7298A">
+                  <a:alpha val="100000"/>
+                </a:srgbClr>
+              </a:solidFill>
+              <a:prstDash val="solid"/>
+              <a:round/>
+            </a:ln>
+          </p:spPr>
+          <p:txBody>
+            <a:bodyPr/>
+            <a:lstStyle/>
+            <a:p/>
+          </p:txBody>
+        </p:sp>
+        <p:sp>
+          <p:nvSpPr>
+            <p:cNvPr id="62" name="pt62"/>
+            <p:cNvSpPr/>
+            <p:nvPr/>
+          </p:nvSpPr>
+          <p:spPr>
+            <a:xfrm>
+              <a:off x="2777843" y="3023685"/>
+              <a:ext cx="74350" cy="74350"/>
+            </a:xfrm>
+            <a:prstGeom prst="ellipse">
+              <a:avLst/>
+            </a:prstGeom>
+            <a:solidFill>
+              <a:srgbClr val="E7298A">
+                <a:alpha val="100000"/>
+              </a:srgbClr>
+            </a:solidFill>
+            <a:ln w="14727" cap="rnd">
+              <a:solidFill>
+                <a:srgbClr val="E7298A">
+                  <a:alpha val="100000"/>
+                </a:srgbClr>
+              </a:solidFill>
+              <a:prstDash val="solid"/>
+              <a:round/>
+            </a:ln>
+          </p:spPr>
+          <p:txBody>
+            <a:bodyPr/>
+            <a:lstStyle/>
+            <a:p/>
+          </p:txBody>
+        </p:sp>
+        <p:sp>
+          <p:nvSpPr>
+            <p:cNvPr id="63" name="pt63"/>
+            <p:cNvSpPr/>
+            <p:nvPr/>
+          </p:nvSpPr>
+          <p:spPr>
+            <a:xfrm>
+              <a:off x="3036148" y="2851277"/>
+              <a:ext cx="74350" cy="74350"/>
+            </a:xfrm>
+            <a:prstGeom prst="ellipse">
+              <a:avLst/>
+            </a:prstGeom>
+            <a:solidFill>
+              <a:srgbClr val="E7298A">
+                <a:alpha val="100000"/>
+              </a:srgbClr>
+            </a:solidFill>
+            <a:ln w="14727" cap="rnd">
+              <a:solidFill>
+                <a:srgbClr val="E7298A">
+                  <a:alpha val="100000"/>
+                </a:srgbClr>
+              </a:solidFill>
+              <a:prstDash val="solid"/>
+              <a:round/>
+            </a:ln>
+          </p:spPr>
+          <p:txBody>
+            <a:bodyPr/>
+            <a:lstStyle/>
+            <a:p/>
+          </p:txBody>
+        </p:sp>
+        <p:sp>
+          <p:nvSpPr>
+            <p:cNvPr id="64" name="pt64"/>
+            <p:cNvSpPr/>
+            <p:nvPr/>
+          </p:nvSpPr>
+          <p:spPr>
+            <a:xfrm>
+              <a:off x="3294454" y="2813539"/>
+              <a:ext cx="74350" cy="74350"/>
+            </a:xfrm>
+            <a:prstGeom prst="ellipse">
+              <a:avLst/>
+            </a:prstGeom>
+            <a:solidFill>
+              <a:srgbClr val="E7298A">
+                <a:alpha val="100000"/>
+              </a:srgbClr>
+            </a:solidFill>
+            <a:ln w="14727" cap="rnd">
+              <a:solidFill>
+                <a:srgbClr val="E7298A">
+                  <a:alpha val="100000"/>
+                </a:srgbClr>
+              </a:solidFill>
+              <a:prstDash val="solid"/>
+              <a:round/>
+            </a:ln>
+          </p:spPr>
+          <p:txBody>
+            <a:bodyPr/>
+            <a:lstStyle/>
+            <a:p/>
+          </p:txBody>
+        </p:sp>
+        <p:sp>
+          <p:nvSpPr>
+            <p:cNvPr id="65" name="pt65"/>
+            <p:cNvSpPr/>
+            <p:nvPr/>
+          </p:nvSpPr>
+          <p:spPr>
+            <a:xfrm>
+              <a:off x="3552759" y="2781190"/>
+              <a:ext cx="74350" cy="74350"/>
+            </a:xfrm>
+            <a:prstGeom prst="ellipse">
+              <a:avLst/>
+            </a:prstGeom>
+            <a:solidFill>
+              <a:srgbClr val="E7298A">
+                <a:alpha val="100000"/>
+              </a:srgbClr>
+            </a:solidFill>
+            <a:ln w="14727" cap="rnd">
+              <a:solidFill>
+                <a:srgbClr val="E7298A">
+                  <a:alpha val="100000"/>
+                </a:srgbClr>
+              </a:solidFill>
+              <a:prstDash val="solid"/>
+              <a:round/>
+            </a:ln>
+          </p:spPr>
+          <p:txBody>
+            <a:bodyPr/>
+            <a:lstStyle/>
+            <a:p/>
+          </p:txBody>
+        </p:sp>
+        <p:sp>
+          <p:nvSpPr>
+            <p:cNvPr id="66" name="pt66"/>
+            <p:cNvSpPr/>
+            <p:nvPr/>
+          </p:nvSpPr>
+          <p:spPr>
+            <a:xfrm>
+              <a:off x="3811065" y="2781849"/>
+              <a:ext cx="74350" cy="74350"/>
+            </a:xfrm>
+            <a:prstGeom prst="ellipse">
+              <a:avLst/>
+            </a:prstGeom>
+            <a:solidFill>
+              <a:srgbClr val="E7298A">
+                <a:alpha val="100000"/>
+              </a:srgbClr>
+            </a:solidFill>
+            <a:ln w="14727" cap="rnd">
+              <a:solidFill>
+                <a:srgbClr val="E7298A">
+                  <a:alpha val="100000"/>
+                </a:srgbClr>
+              </a:solidFill>
+              <a:prstDash val="solid"/>
+              <a:round/>
+            </a:ln>
+          </p:spPr>
+          <p:txBody>
+            <a:bodyPr/>
+            <a:lstStyle/>
+            <a:p/>
+          </p:txBody>
+        </p:sp>
+        <p:sp>
+          <p:nvSpPr>
+            <p:cNvPr id="67" name="pt67"/>
+            <p:cNvSpPr/>
+            <p:nvPr/>
+          </p:nvSpPr>
+          <p:spPr>
+            <a:xfrm>
+              <a:off x="4069370" y="2801533"/>
+              <a:ext cx="74350" cy="74350"/>
+            </a:xfrm>
+            <a:prstGeom prst="ellipse">
+              <a:avLst/>
+            </a:prstGeom>
+            <a:solidFill>
+              <a:srgbClr val="E7298A">
+                <a:alpha val="100000"/>
+              </a:srgbClr>
+            </a:solidFill>
+            <a:ln w="14727" cap="rnd">
+              <a:solidFill>
+                <a:srgbClr val="E7298A">
+                  <a:alpha val="100000"/>
+                </a:srgbClr>
+              </a:solidFill>
+              <a:prstDash val="solid"/>
+              <a:round/>
+            </a:ln>
+          </p:spPr>
+          <p:txBody>
+            <a:bodyPr/>
+            <a:lstStyle/>
+            <a:p/>
+          </p:txBody>
+        </p:sp>
+        <p:sp>
+          <p:nvSpPr>
+            <p:cNvPr id="68" name="pt68"/>
+            <p:cNvSpPr/>
+            <p:nvPr/>
+          </p:nvSpPr>
+          <p:spPr>
+            <a:xfrm>
+              <a:off x="4327675" y="2898345"/>
+              <a:ext cx="74350" cy="74350"/>
+            </a:xfrm>
+            <a:prstGeom prst="ellipse">
+              <a:avLst/>
+            </a:prstGeom>
+            <a:solidFill>
+              <a:srgbClr val="E7298A">
+                <a:alpha val="100000"/>
+              </a:srgbClr>
+            </a:solidFill>
+            <a:ln w="14727" cap="rnd">
+              <a:solidFill>
+                <a:srgbClr val="E7298A">
+                  <a:alpha val="100000"/>
+                </a:srgbClr>
+              </a:solidFill>
+              <a:prstDash val="solid"/>
+              <a:round/>
+            </a:ln>
+          </p:spPr>
+          <p:txBody>
+            <a:bodyPr/>
+            <a:lstStyle/>
+            <a:p/>
+          </p:txBody>
+        </p:sp>
+        <p:sp>
+          <p:nvSpPr>
+            <p:cNvPr id="69" name="pt69"/>
+            <p:cNvSpPr/>
+            <p:nvPr/>
+          </p:nvSpPr>
+          <p:spPr>
+            <a:xfrm>
+              <a:off x="4585981" y="2998382"/>
+              <a:ext cx="74350" cy="74350"/>
+            </a:xfrm>
+            <a:prstGeom prst="ellipse">
+              <a:avLst/>
+            </a:prstGeom>
+            <a:solidFill>
+              <a:srgbClr val="E7298A">
+                <a:alpha val="100000"/>
+              </a:srgbClr>
+            </a:solidFill>
+            <a:ln w="14727" cap="rnd">
+              <a:solidFill>
+                <a:srgbClr val="E7298A">
+                  <a:alpha val="100000"/>
+                </a:srgbClr>
+              </a:solidFill>
+              <a:prstDash val="solid"/>
+              <a:round/>
+            </a:ln>
+          </p:spPr>
+          <p:txBody>
+            <a:bodyPr/>
+            <a:lstStyle/>
+            <a:p/>
+          </p:txBody>
+        </p:sp>
+        <p:sp>
+          <p:nvSpPr>
+            <p:cNvPr id="70" name="pt70"/>
+            <p:cNvSpPr/>
+            <p:nvPr/>
+          </p:nvSpPr>
+          <p:spPr>
+            <a:xfrm>
+              <a:off x="4844286" y="3395242"/>
+              <a:ext cx="74350" cy="74350"/>
+            </a:xfrm>
+            <a:prstGeom prst="ellipse">
+              <a:avLst/>
+            </a:prstGeom>
+            <a:solidFill>
+              <a:srgbClr val="E7298A">
+                <a:alpha val="100000"/>
+              </a:srgbClr>
+            </a:solidFill>
+            <a:ln w="14727" cap="rnd">
+              <a:solidFill>
+                <a:srgbClr val="E7298A">
+                  <a:alpha val="100000"/>
+                </a:srgbClr>
+              </a:solidFill>
+              <a:prstDash val="solid"/>
+              <a:round/>
+            </a:ln>
+          </p:spPr>
+          <p:txBody>
+            <a:bodyPr/>
+            <a:lstStyle/>
+            <a:p/>
+          </p:txBody>
+        </p:sp>
+        <p:sp>
+          <p:nvSpPr>
+            <p:cNvPr id="71" name="pt71"/>
+            <p:cNvSpPr/>
+            <p:nvPr/>
+          </p:nvSpPr>
+          <p:spPr>
+            <a:xfrm>
+              <a:off x="5102592" y="3506104"/>
+              <a:ext cx="74350" cy="74350"/>
+            </a:xfrm>
+            <a:prstGeom prst="ellipse">
+              <a:avLst/>
+            </a:prstGeom>
+            <a:solidFill>
+              <a:srgbClr val="E7298A">
+                <a:alpha val="100000"/>
+              </a:srgbClr>
+            </a:solidFill>
+            <a:ln w="14727" cap="rnd">
+              <a:solidFill>
+                <a:srgbClr val="E7298A">
+                  <a:alpha val="100000"/>
+                </a:srgbClr>
+              </a:solidFill>
+              <a:prstDash val="solid"/>
+              <a:round/>
+            </a:ln>
+          </p:spPr>
+          <p:txBody>
+            <a:bodyPr/>
+            <a:lstStyle/>
+            <a:p/>
+          </p:txBody>
+        </p:sp>
+        <p:sp>
+          <p:nvSpPr>
+            <p:cNvPr id="72" name="pt72"/>
+            <p:cNvSpPr/>
+            <p:nvPr/>
+          </p:nvSpPr>
+          <p:spPr>
+            <a:xfrm>
+              <a:off x="5360897" y="4443166"/>
+              <a:ext cx="74350" cy="74350"/>
+            </a:xfrm>
+            <a:prstGeom prst="ellipse">
+              <a:avLst/>
+            </a:prstGeom>
+            <a:solidFill>
+              <a:srgbClr val="E7298A">
+                <a:alpha val="100000"/>
+              </a:srgbClr>
+            </a:solidFill>
+            <a:ln w="14727" cap="rnd">
+              <a:solidFill>
+                <a:srgbClr val="E7298A">
+                  <a:alpha val="100000"/>
+                </a:srgbClr>
+              </a:solidFill>
+              <a:prstDash val="solid"/>
+              <a:round/>
+            </a:ln>
+          </p:spPr>
+          <p:txBody>
+            <a:bodyPr/>
+            <a:lstStyle/>
+            <a:p/>
+          </p:txBody>
+        </p:sp>
+        <p:sp>
+          <p:nvSpPr>
+            <p:cNvPr id="73" name="pt73"/>
+            <p:cNvSpPr/>
+            <p:nvPr/>
+          </p:nvSpPr>
+          <p:spPr>
+            <a:xfrm>
+              <a:off x="1486316" y="3191798"/>
               <a:ext cx="74350" cy="74350"/>
             </a:xfrm>
             <a:prstGeom prst="ellipse">
@@ -3816,13 +5100,13 @@
         </p:sp>
         <p:sp>
           <p:nvSpPr>
-            <p:cNvPr id="40" name="pt40"/>
-            <p:cNvSpPr/>
-            <p:nvPr/>
-          </p:nvSpPr>
-          <p:spPr>
-            <a:xfrm>
-              <a:off x="1848576" y="2905282"/>
+            <p:cNvPr id="74" name="pt74"/>
+            <p:cNvSpPr/>
+            <p:nvPr/>
+          </p:nvSpPr>
+          <p:spPr>
+            <a:xfrm>
+              <a:off x="1744621" y="3171108"/>
               <a:ext cx="74350" cy="74350"/>
             </a:xfrm>
             <a:prstGeom prst="ellipse">
@@ -3851,13 +5135,13 @@
         </p:sp>
         <p:sp>
           <p:nvSpPr>
-            <p:cNvPr id="41" name="pt41"/>
-            <p:cNvSpPr/>
-            <p:nvPr/>
-          </p:nvSpPr>
-          <p:spPr>
-            <a:xfrm>
-              <a:off x="2166284" y="2861093"/>
+            <p:cNvPr id="75" name="pt75"/>
+            <p:cNvSpPr/>
+            <p:nvPr/>
+          </p:nvSpPr>
+          <p:spPr>
+            <a:xfrm>
+              <a:off x="2002927" y="3131654"/>
               <a:ext cx="74350" cy="74350"/>
             </a:xfrm>
             <a:prstGeom prst="ellipse">
@@ -3886,13 +5170,13 @@
         </p:sp>
         <p:sp>
           <p:nvSpPr>
-            <p:cNvPr id="42" name="pt42"/>
-            <p:cNvSpPr/>
-            <p:nvPr/>
-          </p:nvSpPr>
-          <p:spPr>
-            <a:xfrm>
-              <a:off x="2483993" y="2825158"/>
+            <p:cNvPr id="76" name="pt76"/>
+            <p:cNvSpPr/>
+            <p:nvPr/>
+          </p:nvSpPr>
+          <p:spPr>
+            <a:xfrm>
+              <a:off x="2261232" y="3099569"/>
               <a:ext cx="74350" cy="74350"/>
             </a:xfrm>
             <a:prstGeom prst="ellipse">
@@ -3921,13 +5205,13 @@
         </p:sp>
         <p:sp>
           <p:nvSpPr>
-            <p:cNvPr id="43" name="pt43"/>
-            <p:cNvSpPr/>
-            <p:nvPr/>
-          </p:nvSpPr>
-          <p:spPr>
-            <a:xfrm>
-              <a:off x="2801701" y="2817870"/>
+            <p:cNvPr id="77" name="pt77"/>
+            <p:cNvSpPr/>
+            <p:nvPr/>
+          </p:nvSpPr>
+          <p:spPr>
+            <a:xfrm>
+              <a:off x="2519538" y="3093062"/>
               <a:ext cx="74350" cy="74350"/>
             </a:xfrm>
             <a:prstGeom prst="ellipse">
@@ -3956,13 +5240,13 @@
         </p:sp>
         <p:sp>
           <p:nvSpPr>
-            <p:cNvPr id="44" name="pt44"/>
-            <p:cNvSpPr/>
-            <p:nvPr/>
-          </p:nvSpPr>
-          <p:spPr>
-            <a:xfrm>
-              <a:off x="3119409" y="2802069"/>
+            <p:cNvPr id="78" name="pt78"/>
+            <p:cNvSpPr/>
+            <p:nvPr/>
+          </p:nvSpPr>
+          <p:spPr>
+            <a:xfrm>
+              <a:off x="2777843" y="3078954"/>
               <a:ext cx="74350" cy="74350"/>
             </a:xfrm>
             <a:prstGeom prst="ellipse">
@@ -3991,13 +5275,13 @@
         </p:sp>
         <p:sp>
           <p:nvSpPr>
-            <p:cNvPr id="45" name="pt45"/>
-            <p:cNvSpPr/>
-            <p:nvPr/>
-          </p:nvSpPr>
-          <p:spPr>
-            <a:xfrm>
-              <a:off x="3437117" y="2676534"/>
+            <p:cNvPr id="79" name="pt79"/>
+            <p:cNvSpPr/>
+            <p:nvPr/>
+          </p:nvSpPr>
+          <p:spPr>
+            <a:xfrm>
+              <a:off x="3036148" y="2966869"/>
               <a:ext cx="74350" cy="74350"/>
             </a:xfrm>
             <a:prstGeom prst="ellipse">
@@ -4026,13 +5310,13 @@
         </p:sp>
         <p:sp>
           <p:nvSpPr>
-            <p:cNvPr id="46" name="pt46"/>
-            <p:cNvSpPr/>
-            <p:nvPr/>
-          </p:nvSpPr>
-          <p:spPr>
-            <a:xfrm>
-              <a:off x="3754825" y="2688481"/>
+            <p:cNvPr id="80" name="pt80"/>
+            <p:cNvSpPr/>
+            <p:nvPr/>
+          </p:nvSpPr>
+          <p:spPr>
+            <a:xfrm>
+              <a:off x="3294454" y="2977536"/>
               <a:ext cx="74350" cy="74350"/>
             </a:xfrm>
             <a:prstGeom prst="ellipse">
@@ -4061,13 +5345,13 @@
         </p:sp>
         <p:sp>
           <p:nvSpPr>
-            <p:cNvPr id="47" name="pt47"/>
-            <p:cNvSpPr/>
-            <p:nvPr/>
-          </p:nvSpPr>
-          <p:spPr>
-            <a:xfrm>
-              <a:off x="4072533" y="2743521"/>
+            <p:cNvPr id="81" name="pt81"/>
+            <p:cNvSpPr/>
+            <p:nvPr/>
+          </p:nvSpPr>
+          <p:spPr>
+            <a:xfrm>
+              <a:off x="3552759" y="3026679"/>
               <a:ext cx="74350" cy="74350"/>
             </a:xfrm>
             <a:prstGeom prst="ellipse">
@@ -4096,13 +5380,13 @@
         </p:sp>
         <p:sp>
           <p:nvSpPr>
-            <p:cNvPr id="48" name="pt48"/>
-            <p:cNvSpPr/>
-            <p:nvPr/>
-          </p:nvSpPr>
-          <p:spPr>
-            <a:xfrm>
-              <a:off x="4390241" y="2775794"/>
+            <p:cNvPr id="82" name="pt82"/>
+            <p:cNvSpPr/>
+            <p:nvPr/>
+          </p:nvSpPr>
+          <p:spPr>
+            <a:xfrm>
+              <a:off x="3811065" y="3055494"/>
               <a:ext cx="74350" cy="74350"/>
             </a:xfrm>
             <a:prstGeom prst="ellipse">
@@ -4131,13 +5415,13 @@
         </p:sp>
         <p:sp>
           <p:nvSpPr>
-            <p:cNvPr id="49" name="pt49"/>
-            <p:cNvSpPr/>
-            <p:nvPr/>
-          </p:nvSpPr>
-          <p:spPr>
-            <a:xfrm>
-              <a:off x="4707950" y="2792545"/>
+            <p:cNvPr id="83" name="pt83"/>
+            <p:cNvSpPr/>
+            <p:nvPr/>
+          </p:nvSpPr>
+          <p:spPr>
+            <a:xfrm>
+              <a:off x="4069370" y="3070450"/>
               <a:ext cx="74350" cy="74350"/>
             </a:xfrm>
             <a:prstGeom prst="ellipse">
@@ -4166,13 +5450,13 @@
         </p:sp>
         <p:sp>
           <p:nvSpPr>
-            <p:cNvPr id="50" name="pt50"/>
-            <p:cNvSpPr/>
-            <p:nvPr/>
-          </p:nvSpPr>
-          <p:spPr>
-            <a:xfrm>
-              <a:off x="5025658" y="2770867"/>
+            <p:cNvPr id="84" name="pt84"/>
+            <p:cNvSpPr/>
+            <p:nvPr/>
+          </p:nvSpPr>
+          <p:spPr>
+            <a:xfrm>
+              <a:off x="4327675" y="3051095"/>
               <a:ext cx="74350" cy="74350"/>
             </a:xfrm>
             <a:prstGeom prst="ellipse">
@@ -4201,13 +5485,13 @@
         </p:sp>
         <p:sp>
           <p:nvSpPr>
-            <p:cNvPr id="51" name="pt51"/>
-            <p:cNvSpPr/>
-            <p:nvPr/>
-          </p:nvSpPr>
-          <p:spPr>
-            <a:xfrm>
-              <a:off x="5343366" y="2711557"/>
+            <p:cNvPr id="85" name="pt85"/>
+            <p:cNvSpPr/>
+            <p:nvPr/>
+          </p:nvSpPr>
+          <p:spPr>
+            <a:xfrm>
+              <a:off x="4585981" y="2998140"/>
               <a:ext cx="74350" cy="74350"/>
             </a:xfrm>
             <a:prstGeom prst="ellipse">
@@ -4236,13 +5520,13 @@
         </p:sp>
         <p:sp>
           <p:nvSpPr>
-            <p:cNvPr id="52" name="pt52"/>
-            <p:cNvSpPr/>
-            <p:nvPr/>
-          </p:nvSpPr>
-          <p:spPr>
-            <a:xfrm>
-              <a:off x="5661074" y="2694328"/>
+            <p:cNvPr id="86" name="pt86"/>
+            <p:cNvSpPr/>
+            <p:nvPr/>
+          </p:nvSpPr>
+          <p:spPr>
+            <a:xfrm>
+              <a:off x="4844286" y="2982757"/>
               <a:ext cx="74350" cy="74350"/>
             </a:xfrm>
             <a:prstGeom prst="ellipse">
@@ -4271,13 +5555,13 @@
         </p:sp>
         <p:sp>
           <p:nvSpPr>
-            <p:cNvPr id="53" name="pt53"/>
-            <p:cNvSpPr/>
-            <p:nvPr/>
-          </p:nvSpPr>
-          <p:spPr>
-            <a:xfrm>
-              <a:off x="5978782" y="2596039"/>
+            <p:cNvPr id="87" name="pt87"/>
+            <p:cNvSpPr/>
+            <p:nvPr/>
+          </p:nvSpPr>
+          <p:spPr>
+            <a:xfrm>
+              <a:off x="5102592" y="2894998"/>
               <a:ext cx="74350" cy="74350"/>
             </a:xfrm>
             <a:prstGeom prst="ellipse">
@@ -4306,13 +5590,13 @@
         </p:sp>
         <p:sp>
           <p:nvSpPr>
-            <p:cNvPr id="54" name="pt54"/>
-            <p:cNvSpPr/>
-            <p:nvPr/>
-          </p:nvSpPr>
-          <p:spPr>
-            <a:xfrm>
-              <a:off x="6296490" y="2680939"/>
+            <p:cNvPr id="88" name="pt88"/>
+            <p:cNvSpPr/>
+            <p:nvPr/>
+          </p:nvSpPr>
+          <p:spPr>
+            <a:xfrm>
+              <a:off x="5360897" y="2970802"/>
               <a:ext cx="74350" cy="74350"/>
             </a:xfrm>
             <a:prstGeom prst="ellipse">
@@ -4341,13 +5625,13 @@
         </p:sp>
         <p:sp>
           <p:nvSpPr>
-            <p:cNvPr id="55" name="pt55"/>
-            <p:cNvSpPr/>
-            <p:nvPr/>
-          </p:nvSpPr>
-          <p:spPr>
-            <a:xfrm>
-              <a:off x="1530868" y="4179016"/>
+            <p:cNvPr id="89" name="pt89"/>
+            <p:cNvSpPr/>
+            <p:nvPr/>
+          </p:nvSpPr>
+          <p:spPr>
+            <a:xfrm>
+              <a:off x="1486316" y="4308371"/>
               <a:ext cx="74350" cy="74350"/>
             </a:xfrm>
             <a:prstGeom prst="ellipse">
@@ -4376,13 +5660,13 @@
         </p:sp>
         <p:sp>
           <p:nvSpPr>
-            <p:cNvPr id="56" name="pt56"/>
-            <p:cNvSpPr/>
-            <p:nvPr/>
-          </p:nvSpPr>
-          <p:spPr>
-            <a:xfrm>
-              <a:off x="1848576" y="4134375"/>
+            <p:cNvPr id="90" name="pt90"/>
+            <p:cNvSpPr/>
+            <p:nvPr/>
+          </p:nvSpPr>
+          <p:spPr>
+            <a:xfrm>
+              <a:off x="1744621" y="4268513"/>
               <a:ext cx="74350" cy="74350"/>
             </a:xfrm>
             <a:prstGeom prst="ellipse">
@@ -4411,13 +5695,13 @@
         </p:sp>
         <p:sp>
           <p:nvSpPr>
-            <p:cNvPr id="57" name="pt57"/>
-            <p:cNvSpPr/>
-            <p:nvPr/>
-          </p:nvSpPr>
-          <p:spPr>
-            <a:xfrm>
-              <a:off x="2166284" y="4053917"/>
+            <p:cNvPr id="91" name="pt91"/>
+            <p:cNvSpPr/>
+            <p:nvPr/>
+          </p:nvSpPr>
+          <p:spPr>
+            <a:xfrm>
+              <a:off x="2002927" y="4196675"/>
               <a:ext cx="74350" cy="74350"/>
             </a:xfrm>
             <a:prstGeom prst="ellipse">
@@ -4446,13 +5730,13 @@
         </p:sp>
         <p:sp>
           <p:nvSpPr>
-            <p:cNvPr id="58" name="pt58"/>
-            <p:cNvSpPr/>
-            <p:nvPr/>
-          </p:nvSpPr>
-          <p:spPr>
-            <a:xfrm>
-              <a:off x="2483993" y="3957155"/>
+            <p:cNvPr id="92" name="pt92"/>
+            <p:cNvSpPr/>
+            <p:nvPr/>
+          </p:nvSpPr>
+          <p:spPr>
+            <a:xfrm>
+              <a:off x="2261232" y="4110280"/>
               <a:ext cx="74350" cy="74350"/>
             </a:xfrm>
             <a:prstGeom prst="ellipse">
@@ -4481,13 +5765,13 @@
         </p:sp>
         <p:sp>
           <p:nvSpPr>
-            <p:cNvPr id="59" name="pt59"/>
-            <p:cNvSpPr/>
-            <p:nvPr/>
-          </p:nvSpPr>
-          <p:spPr>
-            <a:xfrm>
-              <a:off x="2801701" y="4077270"/>
+            <p:cNvPr id="93" name="pt93"/>
+            <p:cNvSpPr/>
+            <p:nvPr/>
+          </p:nvSpPr>
+          <p:spPr>
+            <a:xfrm>
+              <a:off x="2519538" y="4217526"/>
               <a:ext cx="74350" cy="74350"/>
             </a:xfrm>
             <a:prstGeom prst="ellipse">
@@ -4516,13 +5800,13 @@
         </p:sp>
         <p:sp>
           <p:nvSpPr>
-            <p:cNvPr id="60" name="pt60"/>
-            <p:cNvSpPr/>
-            <p:nvPr/>
-          </p:nvSpPr>
-          <p:spPr>
-            <a:xfrm>
-              <a:off x="3119409" y="4065493"/>
+            <p:cNvPr id="94" name="pt94"/>
+            <p:cNvSpPr/>
+            <p:nvPr/>
+          </p:nvSpPr>
+          <p:spPr>
+            <a:xfrm>
+              <a:off x="2777843" y="4207011"/>
               <a:ext cx="74350" cy="74350"/>
             </a:xfrm>
             <a:prstGeom prst="ellipse">
@@ -4551,13 +5835,13 @@
         </p:sp>
         <p:sp>
           <p:nvSpPr>
-            <p:cNvPr id="61" name="pt61"/>
-            <p:cNvSpPr/>
-            <p:nvPr/>
-          </p:nvSpPr>
-          <p:spPr>
-            <a:xfrm>
-              <a:off x="3437117" y="3682838"/>
+            <p:cNvPr id="95" name="pt95"/>
+            <p:cNvSpPr/>
+            <p:nvPr/>
+          </p:nvSpPr>
+          <p:spPr>
+            <a:xfrm>
+              <a:off x="3036148" y="3865355"/>
               <a:ext cx="74350" cy="74350"/>
             </a:xfrm>
             <a:prstGeom prst="ellipse">
@@ -4586,13 +5870,13 @@
         </p:sp>
         <p:sp>
           <p:nvSpPr>
-            <p:cNvPr id="62" name="pt62"/>
-            <p:cNvSpPr/>
-            <p:nvPr/>
-          </p:nvSpPr>
-          <p:spPr>
-            <a:xfrm>
-              <a:off x="3754825" y="3659685"/>
+            <p:cNvPr id="96" name="pt96"/>
+            <p:cNvSpPr/>
+            <p:nvPr/>
+          </p:nvSpPr>
+          <p:spPr>
+            <a:xfrm>
+              <a:off x="3294454" y="3844683"/>
               <a:ext cx="74350" cy="74350"/>
             </a:xfrm>
             <a:prstGeom prst="ellipse">
@@ -4621,13 +5905,13 @@
         </p:sp>
         <p:sp>
           <p:nvSpPr>
-            <p:cNvPr id="63" name="pt63"/>
-            <p:cNvSpPr/>
-            <p:nvPr/>
-          </p:nvSpPr>
-          <p:spPr>
-            <a:xfrm>
-              <a:off x="4072533" y="3781509"/>
+            <p:cNvPr id="97" name="pt97"/>
+            <p:cNvSpPr/>
+            <p:nvPr/>
+          </p:nvSpPr>
+          <p:spPr>
+            <a:xfrm>
+              <a:off x="3552759" y="3953454"/>
               <a:ext cx="74350" cy="74350"/>
             </a:xfrm>
             <a:prstGeom prst="ellipse">
@@ -4656,13 +5940,13 @@
         </p:sp>
         <p:sp>
           <p:nvSpPr>
-            <p:cNvPr id="64" name="pt64"/>
-            <p:cNvSpPr/>
-            <p:nvPr/>
-          </p:nvSpPr>
-          <p:spPr>
-            <a:xfrm>
-              <a:off x="4390241" y="3733607"/>
+            <p:cNvPr id="98" name="pt98"/>
+            <p:cNvSpPr/>
+            <p:nvPr/>
+          </p:nvSpPr>
+          <p:spPr>
+            <a:xfrm>
+              <a:off x="3811065" y="3910684"/>
               <a:ext cx="74350" cy="74350"/>
             </a:xfrm>
             <a:prstGeom prst="ellipse">
@@ -4691,13 +5975,13 @@
         </p:sp>
         <p:sp>
           <p:nvSpPr>
-            <p:cNvPr id="65" name="pt65"/>
-            <p:cNvSpPr/>
-            <p:nvPr/>
-          </p:nvSpPr>
-          <p:spPr>
-            <a:xfrm>
-              <a:off x="4707950" y="3580022"/>
+            <p:cNvPr id="99" name="pt99"/>
+            <p:cNvSpPr/>
+            <p:nvPr/>
+          </p:nvSpPr>
+          <p:spPr>
+            <a:xfrm>
+              <a:off x="4069370" y="3773554"/>
               <a:ext cx="74350" cy="74350"/>
             </a:xfrm>
             <a:prstGeom prst="ellipse">
@@ -4726,13 +6010,13 @@
         </p:sp>
         <p:sp>
           <p:nvSpPr>
-            <p:cNvPr id="66" name="pt66"/>
-            <p:cNvSpPr/>
-            <p:nvPr/>
-          </p:nvSpPr>
-          <p:spPr>
-            <a:xfrm>
-              <a:off x="5025658" y="3422151"/>
+            <p:cNvPr id="100" name="pt100"/>
+            <p:cNvSpPr/>
+            <p:nvPr/>
+          </p:nvSpPr>
+          <p:spPr>
+            <a:xfrm>
+              <a:off x="4327675" y="3632599"/>
               <a:ext cx="74350" cy="74350"/>
             </a:xfrm>
             <a:prstGeom prst="ellipse">
@@ -4761,13 +6045,13 @@
         </p:sp>
         <p:sp>
           <p:nvSpPr>
-            <p:cNvPr id="67" name="pt67"/>
-            <p:cNvSpPr/>
-            <p:nvPr/>
-          </p:nvSpPr>
-          <p:spPr>
-            <a:xfrm>
-              <a:off x="5343366" y="3284373"/>
+            <p:cNvPr id="101" name="pt101"/>
+            <p:cNvSpPr/>
+            <p:nvPr/>
+          </p:nvSpPr>
+          <p:spPr>
+            <a:xfrm>
+              <a:off x="4585981" y="3509582"/>
               <a:ext cx="74350" cy="74350"/>
             </a:xfrm>
             <a:prstGeom prst="ellipse">
@@ -4796,13 +6080,13 @@
         </p:sp>
         <p:sp>
           <p:nvSpPr>
-            <p:cNvPr id="68" name="pt68"/>
-            <p:cNvSpPr/>
-            <p:nvPr/>
-          </p:nvSpPr>
-          <p:spPr>
-            <a:xfrm>
-              <a:off x="5661074" y="3242483"/>
+            <p:cNvPr id="102" name="pt102"/>
+            <p:cNvSpPr/>
+            <p:nvPr/>
+          </p:nvSpPr>
+          <p:spPr>
+            <a:xfrm>
+              <a:off x="4844286" y="3472181"/>
               <a:ext cx="74350" cy="74350"/>
             </a:xfrm>
             <a:prstGeom prst="ellipse">
@@ -4831,13 +6115,13 @@
         </p:sp>
         <p:sp>
           <p:nvSpPr>
-            <p:cNvPr id="69" name="pt69"/>
-            <p:cNvSpPr/>
-            <p:nvPr/>
-          </p:nvSpPr>
-          <p:spPr>
-            <a:xfrm>
-              <a:off x="5978782" y="3511765"/>
+            <p:cNvPr id="103" name="pt103"/>
+            <p:cNvSpPr/>
+            <p:nvPr/>
+          </p:nvSpPr>
+          <p:spPr>
+            <a:xfrm>
+              <a:off x="5102592" y="3712611"/>
               <a:ext cx="74350" cy="74350"/>
             </a:xfrm>
             <a:prstGeom prst="ellipse">
@@ -4866,13 +6150,13 @@
         </p:sp>
         <p:sp>
           <p:nvSpPr>
-            <p:cNvPr id="70" name="pt70"/>
-            <p:cNvSpPr/>
-            <p:nvPr/>
-          </p:nvSpPr>
-          <p:spPr>
-            <a:xfrm>
-              <a:off x="6296490" y="4561208"/>
+            <p:cNvPr id="104" name="pt104"/>
+            <p:cNvSpPr/>
+            <p:nvPr/>
+          </p:nvSpPr>
+          <p:spPr>
+            <a:xfrm>
+              <a:off x="5360897" y="4649613"/>
               <a:ext cx="74350" cy="74350"/>
             </a:xfrm>
             <a:prstGeom prst="ellipse">
@@ -4901,13 +6185,13 @@
         </p:sp>
         <p:sp>
           <p:nvSpPr>
-            <p:cNvPr id="71" name="pt71"/>
-            <p:cNvSpPr/>
-            <p:nvPr/>
-          </p:nvSpPr>
-          <p:spPr>
-            <a:xfrm>
-              <a:off x="1530868" y="3288920"/>
+            <p:cNvPr id="105" name="pt105"/>
+            <p:cNvSpPr/>
+            <p:nvPr/>
+          </p:nvSpPr>
+          <p:spPr>
+            <a:xfrm>
+              <a:off x="1486316" y="3513643"/>
               <a:ext cx="74350" cy="74350"/>
             </a:xfrm>
             <a:prstGeom prst="ellipse">
@@ -4936,13 +6220,13 @@
         </p:sp>
         <p:sp>
           <p:nvSpPr>
-            <p:cNvPr id="72" name="pt72"/>
-            <p:cNvSpPr/>
-            <p:nvPr/>
-          </p:nvSpPr>
-          <p:spPr>
-            <a:xfrm>
-              <a:off x="1848576" y="3260194"/>
+            <p:cNvPr id="106" name="pt106"/>
+            <p:cNvSpPr/>
+            <p:nvPr/>
+          </p:nvSpPr>
+          <p:spPr>
+            <a:xfrm>
+              <a:off x="1744621" y="3487994"/>
               <a:ext cx="74350" cy="74350"/>
             </a:xfrm>
             <a:prstGeom prst="ellipse">
@@ -4971,13 +6255,13 @@
         </p:sp>
         <p:sp>
           <p:nvSpPr>
-            <p:cNvPr id="73" name="pt73"/>
-            <p:cNvSpPr/>
-            <p:nvPr/>
-          </p:nvSpPr>
-          <p:spPr>
-            <a:xfrm>
-              <a:off x="2166284" y="3194532"/>
+            <p:cNvPr id="107" name="pt107"/>
+            <p:cNvSpPr/>
+            <p:nvPr/>
+          </p:nvSpPr>
+          <p:spPr>
+            <a:xfrm>
+              <a:off x="2002927" y="3429368"/>
               <a:ext cx="74350" cy="74350"/>
             </a:xfrm>
             <a:prstGeom prst="ellipse">
@@ -5006,13 +6290,13 @@
         </p:sp>
         <p:sp>
           <p:nvSpPr>
-            <p:cNvPr id="74" name="pt74"/>
-            <p:cNvSpPr/>
-            <p:nvPr/>
-          </p:nvSpPr>
-          <p:spPr>
-            <a:xfrm>
-              <a:off x="2483993" y="3127252"/>
+            <p:cNvPr id="108" name="pt108"/>
+            <p:cNvSpPr/>
+            <p:nvPr/>
+          </p:nvSpPr>
+          <p:spPr>
+            <a:xfrm>
+              <a:off x="2261232" y="3369296"/>
               <a:ext cx="74350" cy="74350"/>
             </a:xfrm>
             <a:prstGeom prst="ellipse">
@@ -5041,13 +6325,13 @@
         </p:sp>
         <p:sp>
           <p:nvSpPr>
-            <p:cNvPr id="75" name="pt75"/>
-            <p:cNvSpPr/>
-            <p:nvPr/>
-          </p:nvSpPr>
-          <p:spPr>
-            <a:xfrm>
-              <a:off x="2801701" y="3134395"/>
+            <p:cNvPr id="109" name="pt109"/>
+            <p:cNvSpPr/>
+            <p:nvPr/>
+          </p:nvSpPr>
+          <p:spPr>
+            <a:xfrm>
+              <a:off x="2519538" y="3375674"/>
               <a:ext cx="74350" cy="74350"/>
             </a:xfrm>
             <a:prstGeom prst="ellipse">
@@ -5076,13 +6360,13 @@
         </p:sp>
         <p:sp>
           <p:nvSpPr>
-            <p:cNvPr id="76" name="pt76"/>
-            <p:cNvSpPr/>
-            <p:nvPr/>
-          </p:nvSpPr>
-          <p:spPr>
-            <a:xfrm>
-              <a:off x="3119409" y="3131604"/>
+            <p:cNvPr id="110" name="pt110"/>
+            <p:cNvSpPr/>
+            <p:nvPr/>
+          </p:nvSpPr>
+          <p:spPr>
+            <a:xfrm>
+              <a:off x="2777843" y="3373182"/>
               <a:ext cx="74350" cy="74350"/>
             </a:xfrm>
             <a:prstGeom prst="ellipse">
@@ -5111,13 +6395,13 @@
         </p:sp>
         <p:sp>
           <p:nvSpPr>
-            <p:cNvPr id="77" name="pt77"/>
-            <p:cNvSpPr/>
-            <p:nvPr/>
-          </p:nvSpPr>
-          <p:spPr>
-            <a:xfrm>
-              <a:off x="3437117" y="3008561"/>
+            <p:cNvPr id="111" name="pt111"/>
+            <p:cNvSpPr/>
+            <p:nvPr/>
+          </p:nvSpPr>
+          <p:spPr>
+            <a:xfrm>
+              <a:off x="3036148" y="3263321"/>
               <a:ext cx="74350" cy="74350"/>
             </a:xfrm>
             <a:prstGeom prst="ellipse">
@@ -5146,13 +6430,13 @@
         </p:sp>
         <p:sp>
           <p:nvSpPr>
-            <p:cNvPr id="78" name="pt78"/>
-            <p:cNvSpPr/>
-            <p:nvPr/>
-          </p:nvSpPr>
-          <p:spPr>
-            <a:xfrm>
-              <a:off x="3754825" y="3027464"/>
+            <p:cNvPr id="112" name="pt112"/>
+            <p:cNvSpPr/>
+            <p:nvPr/>
+          </p:nvSpPr>
+          <p:spPr>
+            <a:xfrm>
+              <a:off x="3294454" y="3280199"/>
               <a:ext cx="74350" cy="74350"/>
             </a:xfrm>
             <a:prstGeom prst="ellipse">
@@ -5181,13 +6465,13 @@
         </p:sp>
         <p:sp>
           <p:nvSpPr>
-            <p:cNvPr id="79" name="pt79"/>
-            <p:cNvSpPr/>
-            <p:nvPr/>
-          </p:nvSpPr>
-          <p:spPr>
-            <a:xfrm>
-              <a:off x="4072533" y="3056840"/>
+            <p:cNvPr id="113" name="pt113"/>
+            <p:cNvSpPr/>
+            <p:nvPr/>
+          </p:nvSpPr>
+          <p:spPr>
+            <a:xfrm>
+              <a:off x="3552759" y="3306428"/>
               <a:ext cx="74350" cy="74350"/>
             </a:xfrm>
             <a:prstGeom prst="ellipse">
@@ -5216,13 +6500,13 @@
         </p:sp>
         <p:sp>
           <p:nvSpPr>
-            <p:cNvPr id="80" name="pt80"/>
-            <p:cNvSpPr/>
-            <p:nvPr/>
-          </p:nvSpPr>
-          <p:spPr>
-            <a:xfrm>
-              <a:off x="4390241" y="3184696"/>
+            <p:cNvPr id="114" name="pt114"/>
+            <p:cNvSpPr/>
+            <p:nvPr/>
+          </p:nvSpPr>
+          <p:spPr>
+            <a:xfrm>
+              <a:off x="3811065" y="3420585"/>
               <a:ext cx="74350" cy="74350"/>
             </a:xfrm>
             <a:prstGeom prst="ellipse">
@@ -5251,13 +6535,13 @@
         </p:sp>
         <p:sp>
           <p:nvSpPr>
-            <p:cNvPr id="81" name="pt81"/>
-            <p:cNvSpPr/>
-            <p:nvPr/>
-          </p:nvSpPr>
-          <p:spPr>
-            <a:xfrm>
-              <a:off x="4707950" y="3243336"/>
+            <p:cNvPr id="115" name="pt115"/>
+            <p:cNvSpPr/>
+            <p:nvPr/>
+          </p:nvSpPr>
+          <p:spPr>
+            <a:xfrm>
+              <a:off x="4069370" y="3472942"/>
               <a:ext cx="74350" cy="74350"/>
             </a:xfrm>
             <a:prstGeom prst="ellipse">
@@ -5286,13 +6570,13 @@
         </p:sp>
         <p:sp>
           <p:nvSpPr>
-            <p:cNvPr id="82" name="pt82"/>
-            <p:cNvSpPr/>
-            <p:nvPr/>
-          </p:nvSpPr>
-          <p:spPr>
-            <a:xfrm>
-              <a:off x="5025658" y="3217284"/>
+            <p:cNvPr id="116" name="pt116"/>
+            <p:cNvSpPr/>
+            <p:nvPr/>
+          </p:nvSpPr>
+          <p:spPr>
+            <a:xfrm>
+              <a:off x="4327675" y="3449682"/>
               <a:ext cx="74350" cy="74350"/>
             </a:xfrm>
             <a:prstGeom prst="ellipse">
@@ -5321,13 +6605,13 @@
         </p:sp>
         <p:sp>
           <p:nvSpPr>
-            <p:cNvPr id="83" name="pt83"/>
-            <p:cNvSpPr/>
-            <p:nvPr/>
-          </p:nvSpPr>
-          <p:spPr>
-            <a:xfrm>
-              <a:off x="5343366" y="3167365"/>
+            <p:cNvPr id="117" name="pt117"/>
+            <p:cNvSpPr/>
+            <p:nvPr/>
+          </p:nvSpPr>
+          <p:spPr>
+            <a:xfrm>
+              <a:off x="4585981" y="3405111"/>
               <a:ext cx="74350" cy="74350"/>
             </a:xfrm>
             <a:prstGeom prst="ellipse">
@@ -5356,13 +6640,13 @@
         </p:sp>
         <p:sp>
           <p:nvSpPr>
-            <p:cNvPr id="84" name="pt84"/>
-            <p:cNvSpPr/>
-            <p:nvPr/>
-          </p:nvSpPr>
-          <p:spPr>
-            <a:xfrm>
-              <a:off x="5661074" y="3334794"/>
+            <p:cNvPr id="118" name="pt118"/>
+            <p:cNvSpPr/>
+            <p:nvPr/>
+          </p:nvSpPr>
+          <p:spPr>
+            <a:xfrm>
+              <a:off x="4844286" y="3554601"/>
               <a:ext cx="74350" cy="74350"/>
             </a:xfrm>
             <a:prstGeom prst="ellipse">
@@ -5391,13 +6675,13 @@
         </p:sp>
         <p:sp>
           <p:nvSpPr>
-            <p:cNvPr id="85" name="pt85"/>
-            <p:cNvSpPr/>
-            <p:nvPr/>
-          </p:nvSpPr>
-          <p:spPr>
-            <a:xfrm>
-              <a:off x="5978782" y="3270532"/>
+            <p:cNvPr id="119" name="pt119"/>
+            <p:cNvSpPr/>
+            <p:nvPr/>
+          </p:nvSpPr>
+          <p:spPr>
+            <a:xfrm>
+              <a:off x="5102592" y="3497225"/>
               <a:ext cx="74350" cy="74350"/>
             </a:xfrm>
             <a:prstGeom prst="ellipse">
@@ -5426,13 +6710,13 @@
         </p:sp>
         <p:sp>
           <p:nvSpPr>
-            <p:cNvPr id="86" name="pt86"/>
-            <p:cNvSpPr/>
-            <p:nvPr/>
-          </p:nvSpPr>
-          <p:spPr>
-            <a:xfrm>
-              <a:off x="6296490" y="3475713"/>
+            <p:cNvPr id="120" name="pt120"/>
+            <p:cNvSpPr/>
+            <p:nvPr/>
+          </p:nvSpPr>
+          <p:spPr>
+            <a:xfrm>
+              <a:off x="5360897" y="3680422"/>
               <a:ext cx="74350" cy="74350"/>
             </a:xfrm>
             <a:prstGeom prst="ellipse">
@@ -5461,7 +6745,7 @@
         </p:sp>
         <p:sp>
           <p:nvSpPr>
-            <p:cNvPr id="87" name="tx87"/>
+            <p:cNvPr id="121" name="tx121"/>
             <p:cNvSpPr/>
             <p:nvPr/>
           </p:nvSpPr>
@@ -5504,13 +6788,13 @@
         </p:sp>
         <p:sp>
           <p:nvSpPr>
-            <p:cNvPr id="88" name="tx88"/>
-            <p:cNvSpPr/>
-            <p:nvPr/>
-          </p:nvSpPr>
-          <p:spPr>
-            <a:xfrm>
-              <a:off x="994653" y="4644124"/>
+            <p:cNvPr id="122" name="tx122"/>
+            <p:cNvSpPr/>
+            <p:nvPr/>
+          </p:nvSpPr>
+          <p:spPr>
+            <a:xfrm>
+              <a:off x="994653" y="4720492"/>
               <a:ext cx="232623" cy="133228"/>
             </a:xfrm>
             <a:prstGeom prst="rect">
@@ -5547,13 +6831,13 @@
         </p:sp>
         <p:sp>
           <p:nvSpPr>
-            <p:cNvPr id="89" name="tx89"/>
-            <p:cNvSpPr/>
-            <p:nvPr/>
-          </p:nvSpPr>
-          <p:spPr>
-            <a:xfrm>
-              <a:off x="994653" y="3931359"/>
+            <p:cNvPr id="123" name="tx123"/>
+            <p:cNvSpPr/>
+            <p:nvPr/>
+          </p:nvSpPr>
+          <p:spPr>
+            <a:xfrm>
+              <a:off x="994653" y="4084095"/>
               <a:ext cx="232623" cy="133228"/>
             </a:xfrm>
             <a:prstGeom prst="rect">
@@ -5590,13 +6874,13 @@
         </p:sp>
         <p:sp>
           <p:nvSpPr>
-            <p:cNvPr id="90" name="tx90"/>
-            <p:cNvSpPr/>
-            <p:nvPr/>
-          </p:nvSpPr>
-          <p:spPr>
-            <a:xfrm>
-              <a:off x="994653" y="3218595"/>
+            <p:cNvPr id="124" name="tx124"/>
+            <p:cNvSpPr/>
+            <p:nvPr/>
+          </p:nvSpPr>
+          <p:spPr>
+            <a:xfrm>
+              <a:off x="994653" y="3447698"/>
               <a:ext cx="232623" cy="133228"/>
             </a:xfrm>
             <a:prstGeom prst="rect">
@@ -5633,13 +6917,13 @@
         </p:sp>
         <p:sp>
           <p:nvSpPr>
-            <p:cNvPr id="91" name="tx91"/>
-            <p:cNvSpPr/>
-            <p:nvPr/>
-          </p:nvSpPr>
-          <p:spPr>
-            <a:xfrm>
-              <a:off x="994653" y="2505830"/>
+            <p:cNvPr id="125" name="tx125"/>
+            <p:cNvSpPr/>
+            <p:nvPr/>
+          </p:nvSpPr>
+          <p:spPr>
+            <a:xfrm>
+              <a:off x="994653" y="2811301"/>
               <a:ext cx="232623" cy="133228"/>
             </a:xfrm>
             <a:prstGeom prst="rect">
@@ -5676,13 +6960,13 @@
         </p:sp>
         <p:sp>
           <p:nvSpPr>
-            <p:cNvPr id="92" name="tx92"/>
-            <p:cNvSpPr/>
-            <p:nvPr/>
-          </p:nvSpPr>
-          <p:spPr>
-            <a:xfrm>
-              <a:off x="994653" y="1793066"/>
+            <p:cNvPr id="126" name="tx126"/>
+            <p:cNvSpPr/>
+            <p:nvPr/>
+          </p:nvSpPr>
+          <p:spPr>
+            <a:xfrm>
+              <a:off x="994653" y="2174904"/>
               <a:ext cx="232623" cy="133228"/>
             </a:xfrm>
             <a:prstGeom prst="rect">
@@ -5719,13 +7003,13 @@
         </p:sp>
         <p:sp>
           <p:nvSpPr>
-            <p:cNvPr id="93" name="tx93"/>
-            <p:cNvSpPr/>
-            <p:nvPr/>
-          </p:nvSpPr>
-          <p:spPr>
-            <a:xfrm>
-              <a:off x="1335420" y="5704179"/>
+            <p:cNvPr id="127" name="tx127"/>
+            <p:cNvSpPr/>
+            <p:nvPr/>
+          </p:nvSpPr>
+          <p:spPr>
+            <a:xfrm>
+              <a:off x="1290868" y="5704179"/>
               <a:ext cx="465246" cy="133228"/>
             </a:xfrm>
             <a:prstGeom prst="rect">
@@ -5762,13 +7046,13 @@
         </p:sp>
         <p:sp>
           <p:nvSpPr>
-            <p:cNvPr id="94" name="tx94"/>
-            <p:cNvSpPr/>
-            <p:nvPr/>
-          </p:nvSpPr>
-          <p:spPr>
-            <a:xfrm>
-              <a:off x="1970836" y="5704179"/>
+            <p:cNvPr id="128" name="tx128"/>
+            <p:cNvSpPr/>
+            <p:nvPr/>
+          </p:nvSpPr>
+          <p:spPr>
+            <a:xfrm>
+              <a:off x="1807478" y="5704179"/>
               <a:ext cx="465246" cy="133228"/>
             </a:xfrm>
             <a:prstGeom prst="rect">
@@ -5805,13 +7089,13 @@
         </p:sp>
         <p:sp>
           <p:nvSpPr>
-            <p:cNvPr id="95" name="tx95"/>
-            <p:cNvSpPr/>
-            <p:nvPr/>
-          </p:nvSpPr>
-          <p:spPr>
-            <a:xfrm>
-              <a:off x="2606252" y="5704179"/>
+            <p:cNvPr id="129" name="tx129"/>
+            <p:cNvSpPr/>
+            <p:nvPr/>
+          </p:nvSpPr>
+          <p:spPr>
+            <a:xfrm>
+              <a:off x="2324089" y="5704179"/>
               <a:ext cx="465246" cy="133228"/>
             </a:xfrm>
             <a:prstGeom prst="rect">
@@ -5848,13 +7132,13 @@
         </p:sp>
         <p:sp>
           <p:nvSpPr>
-            <p:cNvPr id="96" name="tx96"/>
-            <p:cNvSpPr/>
-            <p:nvPr/>
-          </p:nvSpPr>
-          <p:spPr>
-            <a:xfrm>
-              <a:off x="3241669" y="5704179"/>
+            <p:cNvPr id="130" name="tx130"/>
+            <p:cNvSpPr/>
+            <p:nvPr/>
+          </p:nvSpPr>
+          <p:spPr>
+            <a:xfrm>
+              <a:off x="2840700" y="5704179"/>
               <a:ext cx="465246" cy="133228"/>
             </a:xfrm>
             <a:prstGeom prst="rect">
@@ -5891,13 +7175,13 @@
         </p:sp>
         <p:sp>
           <p:nvSpPr>
-            <p:cNvPr id="97" name="tx97"/>
-            <p:cNvSpPr/>
-            <p:nvPr/>
-          </p:nvSpPr>
-          <p:spPr>
-            <a:xfrm>
-              <a:off x="3877085" y="5704179"/>
+            <p:cNvPr id="131" name="tx131"/>
+            <p:cNvSpPr/>
+            <p:nvPr/>
+          </p:nvSpPr>
+          <p:spPr>
+            <a:xfrm>
+              <a:off x="3357311" y="5704179"/>
               <a:ext cx="465246" cy="133228"/>
             </a:xfrm>
             <a:prstGeom prst="rect">
@@ -5934,13 +7218,13 @@
         </p:sp>
         <p:sp>
           <p:nvSpPr>
-            <p:cNvPr id="98" name="tx98"/>
-            <p:cNvSpPr/>
-            <p:nvPr/>
-          </p:nvSpPr>
-          <p:spPr>
-            <a:xfrm>
-              <a:off x="4512501" y="5704179"/>
+            <p:cNvPr id="132" name="tx132"/>
+            <p:cNvSpPr/>
+            <p:nvPr/>
+          </p:nvSpPr>
+          <p:spPr>
+            <a:xfrm>
+              <a:off x="3873922" y="5704179"/>
               <a:ext cx="465246" cy="133228"/>
             </a:xfrm>
             <a:prstGeom prst="rect">
@@ -5977,13 +7261,13 @@
         </p:sp>
         <p:sp>
           <p:nvSpPr>
-            <p:cNvPr id="99" name="tx99"/>
-            <p:cNvSpPr/>
-            <p:nvPr/>
-          </p:nvSpPr>
-          <p:spPr>
-            <a:xfrm>
-              <a:off x="5147918" y="5704179"/>
+            <p:cNvPr id="133" name="tx133"/>
+            <p:cNvSpPr/>
+            <p:nvPr/>
+          </p:nvSpPr>
+          <p:spPr>
+            <a:xfrm>
+              <a:off x="4390533" y="5704179"/>
               <a:ext cx="465246" cy="133228"/>
             </a:xfrm>
             <a:prstGeom prst="rect">
@@ -6020,13 +7304,13 @@
         </p:sp>
         <p:sp>
           <p:nvSpPr>
-            <p:cNvPr id="100" name="tx100"/>
-            <p:cNvSpPr/>
-            <p:nvPr/>
-          </p:nvSpPr>
-          <p:spPr>
-            <a:xfrm>
-              <a:off x="5783334" y="5704179"/>
+            <p:cNvPr id="134" name="tx134"/>
+            <p:cNvSpPr/>
+            <p:nvPr/>
+          </p:nvSpPr>
+          <p:spPr>
+            <a:xfrm>
+              <a:off x="4907143" y="5704179"/>
               <a:ext cx="465246" cy="133228"/>
             </a:xfrm>
             <a:prstGeom prst="rect">
@@ -6063,7 +7347,7 @@
         </p:sp>
         <p:sp>
           <p:nvSpPr>
-            <p:cNvPr id="101" name="tx101"/>
+            <p:cNvPr id="135" name="tx135"/>
             <p:cNvSpPr/>
             <p:nvPr/>
           </p:nvSpPr>
@@ -6106,13 +7390,13 @@
         </p:sp>
         <p:sp>
           <p:nvSpPr>
-            <p:cNvPr id="102" name="pl102"/>
-            <p:cNvSpPr/>
-            <p:nvPr/>
-          </p:nvSpPr>
-          <p:spPr>
-            <a:xfrm>
-              <a:off x="6935511" y="3312407"/>
+            <p:cNvPr id="136" name="pl136"/>
+            <p:cNvSpPr/>
+            <p:nvPr/>
+          </p:nvSpPr>
+          <p:spPr>
+            <a:xfrm>
+              <a:off x="5955366" y="3092951"/>
               <a:ext cx="175564" cy="0"/>
             </a:xfrm>
             <a:custGeom>
@@ -6146,13 +7430,13 @@
         </p:sp>
         <p:sp>
           <p:nvSpPr>
-            <p:cNvPr id="103" name="pt103"/>
-            <p:cNvSpPr/>
-            <p:nvPr/>
-          </p:nvSpPr>
-          <p:spPr>
-            <a:xfrm>
-              <a:off x="6986118" y="3275232"/>
+            <p:cNvPr id="137" name="pt137"/>
+            <p:cNvSpPr/>
+            <p:nvPr/>
+          </p:nvSpPr>
+          <p:spPr>
+            <a:xfrm>
+              <a:off x="6005973" y="3055776"/>
               <a:ext cx="74350" cy="74350"/>
             </a:xfrm>
             <a:prstGeom prst="ellipse">
@@ -6181,13 +7465,13 @@
         </p:sp>
         <p:sp>
           <p:nvSpPr>
-            <p:cNvPr id="104" name="pl104"/>
-            <p:cNvSpPr/>
-            <p:nvPr/>
-          </p:nvSpPr>
-          <p:spPr>
-            <a:xfrm>
-              <a:off x="6935511" y="3531863"/>
+            <p:cNvPr id="138" name="pl138"/>
+            <p:cNvSpPr/>
+            <p:nvPr/>
+          </p:nvSpPr>
+          <p:spPr>
+            <a:xfrm>
+              <a:off x="5955366" y="3312407"/>
               <a:ext cx="175564" cy="0"/>
             </a:xfrm>
             <a:custGeom>
@@ -6221,13 +7505,13 @@
         </p:sp>
         <p:sp>
           <p:nvSpPr>
-            <p:cNvPr id="105" name="pt105"/>
-            <p:cNvSpPr/>
-            <p:nvPr/>
-          </p:nvSpPr>
-          <p:spPr>
-            <a:xfrm>
-              <a:off x="6986118" y="3494688"/>
+            <p:cNvPr id="139" name="pt139"/>
+            <p:cNvSpPr/>
+            <p:nvPr/>
+          </p:nvSpPr>
+          <p:spPr>
+            <a:xfrm>
+              <a:off x="6005973" y="3275232"/>
               <a:ext cx="74350" cy="74350"/>
             </a:xfrm>
             <a:prstGeom prst="ellipse">
@@ -6256,13 +7540,13 @@
         </p:sp>
         <p:sp>
           <p:nvSpPr>
-            <p:cNvPr id="106" name="pl106"/>
-            <p:cNvSpPr/>
-            <p:nvPr/>
-          </p:nvSpPr>
-          <p:spPr>
-            <a:xfrm>
-              <a:off x="6935511" y="3751319"/>
+            <p:cNvPr id="140" name="pl140"/>
+            <p:cNvSpPr/>
+            <p:nvPr/>
+          </p:nvSpPr>
+          <p:spPr>
+            <a:xfrm>
+              <a:off x="5955366" y="3531863"/>
               <a:ext cx="175564" cy="0"/>
             </a:xfrm>
             <a:custGeom>
@@ -6296,13 +7580,13 @@
         </p:sp>
         <p:sp>
           <p:nvSpPr>
-            <p:cNvPr id="107" name="pt107"/>
-            <p:cNvSpPr/>
-            <p:nvPr/>
-          </p:nvSpPr>
-          <p:spPr>
-            <a:xfrm>
-              <a:off x="6986118" y="3714144"/>
+            <p:cNvPr id="141" name="pt141"/>
+            <p:cNvSpPr/>
+            <p:nvPr/>
+          </p:nvSpPr>
+          <p:spPr>
+            <a:xfrm>
+              <a:off x="6005973" y="3494688"/>
               <a:ext cx="74350" cy="74350"/>
             </a:xfrm>
             <a:prstGeom prst="ellipse">
@@ -6331,13 +7615,13 @@
         </p:sp>
         <p:sp>
           <p:nvSpPr>
-            <p:cNvPr id="108" name="pl108"/>
-            <p:cNvSpPr/>
-            <p:nvPr/>
-          </p:nvSpPr>
-          <p:spPr>
-            <a:xfrm>
-              <a:off x="6935511" y="3970775"/>
+            <p:cNvPr id="142" name="pl142"/>
+            <p:cNvSpPr/>
+            <p:nvPr/>
+          </p:nvSpPr>
+          <p:spPr>
+            <a:xfrm>
+              <a:off x="5955366" y="3751319"/>
               <a:ext cx="175564" cy="0"/>
             </a:xfrm>
             <a:custGeom>
@@ -6355,6 +7639,156 @@
             </a:custGeom>
             <a:ln w="35231" cap="flat">
               <a:solidFill>
+                <a:srgbClr val="E7298A">
+                  <a:alpha val="100000"/>
+                </a:srgbClr>
+              </a:solidFill>
+              <a:prstDash val="solid"/>
+              <a:round/>
+            </a:ln>
+          </p:spPr>
+          <p:txBody>
+            <a:bodyPr/>
+            <a:lstStyle/>
+            <a:p/>
+          </p:txBody>
+        </p:sp>
+        <p:sp>
+          <p:nvSpPr>
+            <p:cNvPr id="143" name="pt143"/>
+            <p:cNvSpPr/>
+            <p:nvPr/>
+          </p:nvSpPr>
+          <p:spPr>
+            <a:xfrm>
+              <a:off x="6005973" y="3714144"/>
+              <a:ext cx="74350" cy="74350"/>
+            </a:xfrm>
+            <a:prstGeom prst="ellipse">
+              <a:avLst/>
+            </a:prstGeom>
+            <a:solidFill>
+              <a:srgbClr val="E7298A">
+                <a:alpha val="100000"/>
+              </a:srgbClr>
+            </a:solidFill>
+            <a:ln w="14727" cap="rnd">
+              <a:solidFill>
+                <a:srgbClr val="E7298A">
+                  <a:alpha val="100000"/>
+                </a:srgbClr>
+              </a:solidFill>
+              <a:prstDash val="solid"/>
+              <a:round/>
+            </a:ln>
+          </p:spPr>
+          <p:txBody>
+            <a:bodyPr/>
+            <a:lstStyle/>
+            <a:p/>
+          </p:txBody>
+        </p:sp>
+        <p:sp>
+          <p:nvSpPr>
+            <p:cNvPr id="144" name="pl144"/>
+            <p:cNvSpPr/>
+            <p:nvPr/>
+          </p:nvSpPr>
+          <p:spPr>
+            <a:xfrm>
+              <a:off x="5955366" y="3970775"/>
+              <a:ext cx="175564" cy="0"/>
+            </a:xfrm>
+            <a:custGeom>
+              <a:avLst/>
+              <a:pathLst>
+                <a:path w="175564" h="0">
+                  <a:moveTo>
+                    <a:pt x="0" y="0"/>
+                  </a:moveTo>
+                  <a:lnTo>
+                    <a:pt x="175564" y="0"/>
+                  </a:lnTo>
+                </a:path>
+              </a:pathLst>
+            </a:custGeom>
+            <a:ln w="35231" cap="flat">
+              <a:solidFill>
+                <a:srgbClr val="F0C419">
+                  <a:alpha val="100000"/>
+                </a:srgbClr>
+              </a:solidFill>
+              <a:prstDash val="solid"/>
+              <a:round/>
+            </a:ln>
+          </p:spPr>
+          <p:txBody>
+            <a:bodyPr/>
+            <a:lstStyle/>
+            <a:p/>
+          </p:txBody>
+        </p:sp>
+        <p:sp>
+          <p:nvSpPr>
+            <p:cNvPr id="145" name="pt145"/>
+            <p:cNvSpPr/>
+            <p:nvPr/>
+          </p:nvSpPr>
+          <p:spPr>
+            <a:xfrm>
+              <a:off x="6005973" y="3933600"/>
+              <a:ext cx="74350" cy="74350"/>
+            </a:xfrm>
+            <a:prstGeom prst="ellipse">
+              <a:avLst/>
+            </a:prstGeom>
+            <a:solidFill>
+              <a:srgbClr val="F0C419">
+                <a:alpha val="100000"/>
+              </a:srgbClr>
+            </a:solidFill>
+            <a:ln w="14727" cap="rnd">
+              <a:solidFill>
+                <a:srgbClr val="F0C419">
+                  <a:alpha val="100000"/>
+                </a:srgbClr>
+              </a:solidFill>
+              <a:prstDash val="solid"/>
+              <a:round/>
+            </a:ln>
+          </p:spPr>
+          <p:txBody>
+            <a:bodyPr/>
+            <a:lstStyle/>
+            <a:p/>
+          </p:txBody>
+        </p:sp>
+        <p:sp>
+          <p:nvSpPr>
+            <p:cNvPr id="146" name="pl146"/>
+            <p:cNvSpPr/>
+            <p:nvPr/>
+          </p:nvSpPr>
+          <p:spPr>
+            <a:xfrm>
+              <a:off x="5955366" y="4190231"/>
+              <a:ext cx="175564" cy="0"/>
+            </a:xfrm>
+            <a:custGeom>
+              <a:avLst/>
+              <a:pathLst>
+                <a:path w="175564" h="0">
+                  <a:moveTo>
+                    <a:pt x="0" y="0"/>
+                  </a:moveTo>
+                  <a:lnTo>
+                    <a:pt x="175564" y="0"/>
+                  </a:lnTo>
+                </a:path>
+              </a:pathLst>
+            </a:custGeom>
+            <a:ln w="35231" cap="flat">
+              <a:solidFill>
                 <a:srgbClr val="D2B48C">
                   <a:alpha val="100000"/>
                 </a:srgbClr>
@@ -6371,13 +7805,13 @@
         </p:sp>
         <p:sp>
           <p:nvSpPr>
-            <p:cNvPr id="109" name="pt109"/>
-            <p:cNvSpPr/>
-            <p:nvPr/>
-          </p:nvSpPr>
-          <p:spPr>
-            <a:xfrm>
-              <a:off x="6986118" y="3933600"/>
+            <p:cNvPr id="147" name="pt147"/>
+            <p:cNvSpPr/>
+            <p:nvPr/>
+          </p:nvSpPr>
+          <p:spPr>
+            <a:xfrm>
+              <a:off x="6005973" y="4153056"/>
               <a:ext cx="74350" cy="74350"/>
             </a:xfrm>
             <a:prstGeom prst="ellipse">
@@ -6406,13 +7840,13 @@
         </p:sp>
         <p:sp>
           <p:nvSpPr>
-            <p:cNvPr id="110" name="tx110"/>
-            <p:cNvSpPr/>
-            <p:nvPr/>
-          </p:nvSpPr>
-          <p:spPr>
-            <a:xfrm>
-              <a:off x="7246894" y="3245793"/>
+            <p:cNvPr id="148" name="tx148"/>
+            <p:cNvSpPr/>
+            <p:nvPr/>
+          </p:nvSpPr>
+          <p:spPr>
+            <a:xfrm>
+              <a:off x="6266749" y="3026337"/>
               <a:ext cx="1360444" cy="133228"/>
             </a:xfrm>
             <a:prstGeom prst="rect">
@@ -6449,14 +7883,14 @@
         </p:sp>
         <p:sp>
           <p:nvSpPr>
-            <p:cNvPr id="111" name="tx111"/>
-            <p:cNvSpPr/>
-            <p:nvPr/>
-          </p:nvSpPr>
-          <p:spPr>
-            <a:xfrm>
-              <a:off x="7246894" y="3465249"/>
-              <a:ext cx="4107759" cy="133228"/>
+            <p:cNvPr id="149" name="tx149"/>
+            <p:cNvSpPr/>
+            <p:nvPr/>
+          </p:nvSpPr>
+          <p:spPr>
+            <a:xfrm>
+              <a:off x="6266749" y="3245793"/>
+              <a:ext cx="5087904" cy="133228"/>
             </a:xfrm>
             <a:prstGeom prst="rect">
               <a:avLst/>
@@ -6485,20 +7919,20 @@
                   <a:latin typeface="DejaVu Sans"/>
                   <a:cs typeface="DejaVu Sans"/>
                 </a:rPr>
-                <a:t>TRG → The Nature Conservancy (Heartlands)</a:t>
+                <a:t>TRG → Verdant → The Nature Conservancy (Heartlands)</a:t>
               </a:r>
             </a:p>
           </p:txBody>
         </p:sp>
         <p:sp>
           <p:nvSpPr>
-            <p:cNvPr id="112" name="tx112"/>
-            <p:cNvSpPr/>
-            <p:nvPr/>
-          </p:nvSpPr>
-          <p:spPr>
-            <a:xfrm>
-              <a:off x="7246894" y="3684705"/>
+            <p:cNvPr id="150" name="tx150"/>
+            <p:cNvSpPr/>
+            <p:nvPr/>
+          </p:nvSpPr>
+          <p:spPr>
+            <a:xfrm>
+              <a:off x="6266749" y="3465249"/>
               <a:ext cx="4038081" cy="133228"/>
             </a:xfrm>
             <a:prstGeom prst="rect">
@@ -6535,14 +7969,14 @@
         </p:sp>
         <p:sp>
           <p:nvSpPr>
-            <p:cNvPr id="113" name="tx113"/>
-            <p:cNvSpPr/>
-            <p:nvPr/>
-          </p:nvSpPr>
-          <p:spPr>
-            <a:xfrm>
-              <a:off x="7246894" y="3904161"/>
-              <a:ext cx="2613263" cy="133228"/>
+            <p:cNvPr id="151" name="tx151"/>
+            <p:cNvSpPr/>
+            <p:nvPr/>
+          </p:nvSpPr>
+          <p:spPr>
+            <a:xfrm>
+              <a:off x="6266749" y="3684705"/>
+              <a:ext cx="2132655" cy="133228"/>
             </a:xfrm>
             <a:prstGeom prst="rect">
               <a:avLst/>
@@ -6571,14 +8005,100 @@
                   <a:latin typeface="DejaVu Sans"/>
                   <a:cs typeface="DejaVu Sans"/>
                 </a:rPr>
-                <a:t>Other private → same owner</a:t>
+                <a:t>Molpus → kept (mostly)</a:t>
               </a:r>
             </a:p>
           </p:txBody>
         </p:sp>
         <p:sp>
           <p:nvSpPr>
-            <p:cNvPr id="114" name="tx114"/>
+            <p:cNvPr id="152" name="tx152"/>
+            <p:cNvSpPr/>
+            <p:nvPr/>
+          </p:nvSpPr>
+          <p:spPr>
+            <a:xfrm>
+              <a:off x="6266749" y="3904161"/>
+              <a:ext cx="1152692" cy="133228"/>
+            </a:xfrm>
+            <a:prstGeom prst="rect">
+              <a:avLst/>
+            </a:prstGeom>
+            <a:noFill/>
+          </p:spPr>
+          <p:txBody>
+            <a:bodyPr lIns="0" rIns="0" tIns="0" bIns="0" anchorCtr="1" anchor="ctr" wrap="none"/>
+            <a:lstStyle/>
+            <a:p>
+              <a:pPr algn="l" marL="0" marR="0" indent="0">
+                <a:spcBef>
+                  <a:spcPts val="0"/>
+                </a:spcBef>
+                <a:spcAft>
+                  <a:spcPts val="0"/>
+                </a:spcAft>
+              </a:pPr>
+              <a:r>
+                <a:rPr sz="1440" i="0" b="0">
+                  <a:solidFill>
+                    <a:srgbClr val="000000">
+                      <a:alpha val="100000"/>
+                    </a:srgbClr>
+                  </a:solidFill>
+                  <a:latin typeface="DejaVu Sans"/>
+                  <a:cs typeface="DejaVu Sans"/>
+                </a:rPr>
+                <a:t>Lyme → kept</a:t>
+              </a:r>
+            </a:p>
+          </p:txBody>
+        </p:sp>
+        <p:sp>
+          <p:nvSpPr>
+            <p:cNvPr id="153" name="tx153"/>
+            <p:cNvSpPr/>
+            <p:nvPr/>
+          </p:nvSpPr>
+          <p:spPr>
+            <a:xfrm>
+              <a:off x="6266749" y="4123617"/>
+              <a:ext cx="1892259" cy="133228"/>
+            </a:xfrm>
+            <a:prstGeom prst="rect">
+              <a:avLst/>
+            </a:prstGeom>
+            <a:noFill/>
+          </p:spPr>
+          <p:txBody>
+            <a:bodyPr lIns="0" rIns="0" tIns="0" bIns="0" anchorCtr="1" anchor="ctr" wrap="none"/>
+            <a:lstStyle/>
+            <a:p>
+              <a:pPr algn="l" marL="0" marR="0" indent="0">
+                <a:spcBef>
+                  <a:spcPts val="0"/>
+                </a:spcBef>
+                <a:spcAft>
+                  <a:spcPts val="0"/>
+                </a:spcAft>
+              </a:pPr>
+              <a:r>
+                <a:rPr sz="1440" i="0" b="0">
+                  <a:solidFill>
+                    <a:srgbClr val="000000">
+                      <a:alpha val="100000"/>
+                    </a:srgbClr>
+                  </a:solidFill>
+                  <a:latin typeface="DejaVu Sans"/>
+                  <a:cs typeface="DejaVu Sans"/>
+                </a:rPr>
+                <a:t>Other private → kept</a:t>
+              </a:r>
+            </a:p>
+          </p:txBody>
+        </p:sp>
+        <p:sp>
+          <p:nvSpPr>
+            <p:cNvPr id="154" name="tx154"/>
             <p:cNvSpPr/>
             <p:nvPr/>
           </p:nvSpPr>
@@ -6621,7 +8141,7 @@
         </p:sp>
         <p:sp>
           <p:nvSpPr>
-            <p:cNvPr id="115" name="tx115"/>
+            <p:cNvPr id="155" name="tx155"/>
             <p:cNvSpPr/>
             <p:nvPr/>
           </p:nvSpPr>
